--- a/03-课件PPT/讲次版/第5章-1-讲次 5-1 · Multi-Agent 模式与边界.pptx
+++ b/03-课件PPT/讲次版/第5章-1-讲次 5-1 · Multi-Agent 模式与边界.pptx
@@ -6239,7 +6239,7 @@
                 </a:solidFill>
                 <a:latin typeface="PingFang SC"/>
               </a:rPr>
-              <a:t>5. 全部完成汇总|计划是文档不是契约</a:t>
+              <a:t>5. 全部完成汇总</a:t>
             </a:r>
           </a:p>
         </p:txBody>
@@ -8450,7 +8450,7 @@
                 </a:solidFill>
                 <a:latin typeface="PingFang SC"/>
               </a:rPr>
-              <a:t>4. 打回则修正再审|多一次调用=少一轮线上事故</a:t>
+              <a:t>4. 打回则修正再审</a:t>
             </a:r>
           </a:p>
         </p:txBody>
@@ -11428,7 +11428,7 @@
                 </a:solidFill>
                 <a:latin typeface="PingFang SC"/>
               </a:rPr>
-              <a:t>默认只读+预算|一个学坏不带坏全场</a:t>
+              <a:t>默认只读+预算</a:t>
             </a:r>
           </a:p>
         </p:txBody>
@@ -16012,7 +16012,7 @@
                 </a:solidFill>
                 <a:latin typeface="PingFang SC"/>
               </a:rPr>
-              <a:t>平局/高危必走|仲裁结果+理由均留痕</a:t>
+              <a:t>平局/高危必走</a:t>
             </a:r>
           </a:p>
         </p:txBody>
@@ -24102,7 +24102,7 @@
                 </a:solidFill>
                 <a:latin typeface="PingFang SC"/>
               </a:rPr>
-              <a:t>冲突检测→证据多数仲裁=结论乙|同 aspect 分歧才算冲突</a:t>
+              <a:t>冲突检测→证据多数仲裁=结论乙</a:t>
             </a:r>
           </a:p>
         </p:txBody>
@@ -29695,7 +29695,7 @@
                 </a:solidFill>
                 <a:latin typeface="PingFang SC"/>
               </a:rPr>
-              <a:t>多 Agent = 多倍 Token|先问要不要,再问怎么做</a:t>
+              <a:t>多 Agent = 多倍 Token</a:t>
             </a:r>
           </a:p>
         </p:txBody>
@@ -31915,14 +31915,2424 @@
       </p:sp>
       <p:sp>
         <p:nvSpPr>
-          <p:cNvPr id="5" name="TextBox 4"/>
+          <p:cNvPr id="5" name="Rounded Rectangle 4"/>
+          <p:cNvSpPr/>
+          <p:nvPr/>
+        </p:nvSpPr>
+        <p:spPr>
+          <a:xfrm>
+            <a:off x="1847850" y="914400"/>
+            <a:ext cx="8877300" cy="1100137"/>
+          </a:xfrm>
+          <a:prstGeom prst="roundRect">
+            <a:avLst>
+              <a:gd name="adj" fmla="val 8000"/>
+            </a:avLst>
+          </a:prstGeom>
+          <a:solidFill>
+            <a:srgbClr val="F1F5F9"/>
+          </a:solidFill>
+          <a:ln>
+            <a:noFill/>
+          </a:ln>
+          <a:effectLst/>
+        </p:spPr>
+        <p:style>
+          <a:lnRef idx="1">
+            <a:schemeClr val="accent1"/>
+          </a:lnRef>
+          <a:fillRef idx="3">
+            <a:schemeClr val="accent1"/>
+          </a:fillRef>
+          <a:effectRef idx="2">
+            <a:schemeClr val="accent1"/>
+          </a:effectRef>
+          <a:fontRef idx="minor">
+            <a:schemeClr val="lt1"/>
+          </a:fontRef>
+        </p:style>
+        <p:txBody>
+          <a:bodyPr rtlCol="0" anchor="ctr"/>
+          <a:lstStyle/>
+          <a:p>
+            <a:pPr algn="ctr"/>
+          </a:p>
+        </p:txBody>
+      </p:sp>
+      <p:sp>
+        <p:nvSpPr>
+          <p:cNvPr id="6" name="TextBox 5"/>
           <p:cNvSpPr txBox="1"/>
           <p:nvPr/>
         </p:nvSpPr>
         <p:spPr>
           <a:xfrm>
-            <a:off x="9334500" y="0"/>
-            <a:ext cx="2667000" cy="704850"/>
+            <a:off x="1962150" y="685800"/>
+            <a:ext cx="1905000" cy="209550"/>
+          </a:xfrm>
+          <a:prstGeom prst="rect">
+            <a:avLst/>
+          </a:prstGeom>
+          <a:noFill/>
+        </p:spPr>
+        <p:txBody>
+          <a:bodyPr wrap="square" anchor="ctr">
+            <a:spAutoFit/>
+          </a:bodyPr>
+          <a:lstStyle/>
+          <a:p>
+            <a:pPr algn="l">
+              <a:lnSpc>
+                <a:spcPct val="100000"/>
+              </a:lnSpc>
+            </a:pPr>
+            <a:r>
+              <a:rPr sz="1100" b="1">
+                <a:solidFill>
+                  <a:srgbClr val="2563EB"/>
+                </a:solidFill>
+                <a:latin typeface="PingFang SC"/>
+              </a:rPr>
+              <a:t>L1</a:t>
+            </a:r>
+          </a:p>
+        </p:txBody>
+      </p:sp>
+      <p:sp>
+        <p:nvSpPr>
+          <p:cNvPr id="7" name="Rounded Rectangle 6"/>
+          <p:cNvSpPr/>
+          <p:nvPr/>
+        </p:nvSpPr>
+        <p:spPr>
+          <a:xfrm>
+            <a:off x="1905000" y="952500"/>
+            <a:ext cx="2819400" cy="1023937"/>
+          </a:xfrm>
+          <a:prstGeom prst="roundRect">
+            <a:avLst>
+              <a:gd name="adj" fmla="val 8000"/>
+            </a:avLst>
+          </a:prstGeom>
+          <a:solidFill>
+            <a:srgbClr val="FFFFFF"/>
+          </a:solidFill>
+          <a:ln w="12700">
+            <a:solidFill>
+              <a:srgbClr val="2563EB"/>
+            </a:solidFill>
+          </a:ln>
+          <a:effectLst/>
+        </p:spPr>
+        <p:style>
+          <a:lnRef idx="1">
+            <a:schemeClr val="accent1"/>
+          </a:lnRef>
+          <a:fillRef idx="3">
+            <a:schemeClr val="accent1"/>
+          </a:fillRef>
+          <a:effectRef idx="2">
+            <a:schemeClr val="accent1"/>
+          </a:effectRef>
+          <a:fontRef idx="minor">
+            <a:schemeClr val="lt1"/>
+          </a:fontRef>
+        </p:style>
+        <p:txBody>
+          <a:bodyPr rtlCol="0" anchor="ctr"/>
+          <a:lstStyle/>
+          <a:p>
+            <a:pPr algn="ctr"/>
+          </a:p>
+        </p:txBody>
+      </p:sp>
+      <p:sp>
+        <p:nvSpPr>
+          <p:cNvPr id="8" name="Rectangle 7"/>
+          <p:cNvSpPr/>
+          <p:nvPr/>
+        </p:nvSpPr>
+        <p:spPr>
+          <a:xfrm>
+            <a:off x="1905000" y="952500"/>
+            <a:ext cx="47625" cy="1023937"/>
+          </a:xfrm>
+          <a:prstGeom prst="rect">
+            <a:avLst/>
+          </a:prstGeom>
+          <a:solidFill>
+            <a:srgbClr val="2563EB"/>
+          </a:solidFill>
+          <a:ln>
+            <a:noFill/>
+          </a:ln>
+          <a:effectLst/>
+        </p:spPr>
+        <p:style>
+          <a:lnRef idx="1">
+            <a:schemeClr val="accent1"/>
+          </a:lnRef>
+          <a:fillRef idx="3">
+            <a:schemeClr val="accent1"/>
+          </a:fillRef>
+          <a:effectRef idx="2">
+            <a:schemeClr val="accent1"/>
+          </a:effectRef>
+          <a:fontRef idx="minor">
+            <a:schemeClr val="lt1"/>
+          </a:fontRef>
+        </p:style>
+        <p:txBody>
+          <a:bodyPr rtlCol="0" anchor="ctr"/>
+          <a:lstStyle/>
+          <a:p>
+            <a:pPr algn="ctr"/>
+          </a:p>
+        </p:txBody>
+      </p:sp>
+      <p:sp>
+        <p:nvSpPr>
+          <p:cNvPr id="9" name="TextBox 8"/>
+          <p:cNvSpPr txBox="1"/>
+          <p:nvPr/>
+        </p:nvSpPr>
+        <p:spPr>
+          <a:xfrm>
+            <a:off x="2057400" y="952500"/>
+            <a:ext cx="2552700" cy="1023937"/>
+          </a:xfrm>
+          <a:prstGeom prst="rect">
+            <a:avLst/>
+          </a:prstGeom>
+          <a:noFill/>
+        </p:spPr>
+        <p:txBody>
+          <a:bodyPr wrap="none" anchor="ctr">
+            <a:spAutoFit/>
+          </a:bodyPr>
+          <a:lstStyle/>
+          <a:p>
+            <a:pPr algn="l">
+              <a:lnSpc>
+                <a:spcPct val="115000"/>
+              </a:lnSpc>
+            </a:pPr>
+            <a:r>
+              <a:rPr sz="1100" b="1">
+                <a:solidFill>
+                  <a:srgbClr val="0B1D3A"/>
+                </a:solidFill>
+                <a:latin typeface="PingFang SC"/>
+              </a:rPr>
+              <a:t>主控 Agent:任务拆解</a:t>
+            </a:r>
+          </a:p>
+        </p:txBody>
+      </p:sp>
+      <p:sp>
+        <p:nvSpPr>
+          <p:cNvPr id="10" name="Rounded Rectangle 9"/>
+          <p:cNvSpPr/>
+          <p:nvPr/>
+        </p:nvSpPr>
+        <p:spPr>
+          <a:xfrm>
+            <a:off x="4876800" y="952500"/>
+            <a:ext cx="2819400" cy="1023937"/>
+          </a:xfrm>
+          <a:prstGeom prst="roundRect">
+            <a:avLst>
+              <a:gd name="adj" fmla="val 8000"/>
+            </a:avLst>
+          </a:prstGeom>
+          <a:solidFill>
+            <a:srgbClr val="FFFFFF"/>
+          </a:solidFill>
+          <a:ln w="12700">
+            <a:solidFill>
+              <a:srgbClr val="2563EB"/>
+            </a:solidFill>
+          </a:ln>
+          <a:effectLst/>
+        </p:spPr>
+        <p:style>
+          <a:lnRef idx="1">
+            <a:schemeClr val="accent1"/>
+          </a:lnRef>
+          <a:fillRef idx="3">
+            <a:schemeClr val="accent1"/>
+          </a:fillRef>
+          <a:effectRef idx="2">
+            <a:schemeClr val="accent1"/>
+          </a:effectRef>
+          <a:fontRef idx="minor">
+            <a:schemeClr val="lt1"/>
+          </a:fontRef>
+        </p:style>
+        <p:txBody>
+          <a:bodyPr rtlCol="0" anchor="ctr"/>
+          <a:lstStyle/>
+          <a:p>
+            <a:pPr algn="ctr"/>
+          </a:p>
+        </p:txBody>
+      </p:sp>
+      <p:sp>
+        <p:nvSpPr>
+          <p:cNvPr id="11" name="Rectangle 10"/>
+          <p:cNvSpPr/>
+          <p:nvPr/>
+        </p:nvSpPr>
+        <p:spPr>
+          <a:xfrm>
+            <a:off x="4876800" y="952500"/>
+            <a:ext cx="47625" cy="1023937"/>
+          </a:xfrm>
+          <a:prstGeom prst="rect">
+            <a:avLst/>
+          </a:prstGeom>
+          <a:solidFill>
+            <a:srgbClr val="2563EB"/>
+          </a:solidFill>
+          <a:ln>
+            <a:noFill/>
+          </a:ln>
+          <a:effectLst/>
+        </p:spPr>
+        <p:style>
+          <a:lnRef idx="1">
+            <a:schemeClr val="accent1"/>
+          </a:lnRef>
+          <a:fillRef idx="3">
+            <a:schemeClr val="accent1"/>
+          </a:fillRef>
+          <a:effectRef idx="2">
+            <a:schemeClr val="accent1"/>
+          </a:effectRef>
+          <a:fontRef idx="minor">
+            <a:schemeClr val="lt1"/>
+          </a:fontRef>
+        </p:style>
+        <p:txBody>
+          <a:bodyPr rtlCol="0" anchor="ctr"/>
+          <a:lstStyle/>
+          <a:p>
+            <a:pPr algn="ctr"/>
+          </a:p>
+        </p:txBody>
+      </p:sp>
+      <p:sp>
+        <p:nvSpPr>
+          <p:cNvPr id="12" name="TextBox 11"/>
+          <p:cNvSpPr txBox="1"/>
+          <p:nvPr/>
+        </p:nvSpPr>
+        <p:spPr>
+          <a:xfrm>
+            <a:off x="5029200" y="952500"/>
+            <a:ext cx="2552700" cy="1023937"/>
+          </a:xfrm>
+          <a:prstGeom prst="rect">
+            <a:avLst/>
+          </a:prstGeom>
+          <a:noFill/>
+        </p:spPr>
+        <p:txBody>
+          <a:bodyPr wrap="none" anchor="ctr">
+            <a:spAutoFit/>
+          </a:bodyPr>
+          <a:lstStyle/>
+          <a:p>
+            <a:pPr algn="l">
+              <a:lnSpc>
+                <a:spcPct val="115000"/>
+              </a:lnSpc>
+            </a:pPr>
+            <a:r>
+              <a:rPr sz="1300" b="1">
+                <a:solidFill>
+                  <a:srgbClr val="0B1D3A"/>
+                </a:solidFill>
+                <a:latin typeface="PingFang SC"/>
+              </a:rPr>
+              <a:t>调度</a:t>
+            </a:r>
+          </a:p>
+        </p:txBody>
+      </p:sp>
+      <p:sp>
+        <p:nvSpPr>
+          <p:cNvPr id="13" name="Rounded Rectangle 12"/>
+          <p:cNvSpPr/>
+          <p:nvPr/>
+        </p:nvSpPr>
+        <p:spPr>
+          <a:xfrm>
+            <a:off x="7848600" y="952500"/>
+            <a:ext cx="2819400" cy="1023937"/>
+          </a:xfrm>
+          <a:prstGeom prst="roundRect">
+            <a:avLst>
+              <a:gd name="adj" fmla="val 8000"/>
+            </a:avLst>
+          </a:prstGeom>
+          <a:solidFill>
+            <a:srgbClr val="FFFFFF"/>
+          </a:solidFill>
+          <a:ln w="12700">
+            <a:solidFill>
+              <a:srgbClr val="2563EB"/>
+            </a:solidFill>
+          </a:ln>
+          <a:effectLst/>
+        </p:spPr>
+        <p:style>
+          <a:lnRef idx="1">
+            <a:schemeClr val="accent1"/>
+          </a:lnRef>
+          <a:fillRef idx="3">
+            <a:schemeClr val="accent1"/>
+          </a:fillRef>
+          <a:effectRef idx="2">
+            <a:schemeClr val="accent1"/>
+          </a:effectRef>
+          <a:fontRef idx="minor">
+            <a:schemeClr val="lt1"/>
+          </a:fontRef>
+        </p:style>
+        <p:txBody>
+          <a:bodyPr rtlCol="0" anchor="ctr"/>
+          <a:lstStyle/>
+          <a:p>
+            <a:pPr algn="ctr"/>
+          </a:p>
+        </p:txBody>
+      </p:sp>
+      <p:sp>
+        <p:nvSpPr>
+          <p:cNvPr id="14" name="Rectangle 13"/>
+          <p:cNvSpPr/>
+          <p:nvPr/>
+        </p:nvSpPr>
+        <p:spPr>
+          <a:xfrm>
+            <a:off x="7848600" y="952500"/>
+            <a:ext cx="47625" cy="1023937"/>
+          </a:xfrm>
+          <a:prstGeom prst="rect">
+            <a:avLst/>
+          </a:prstGeom>
+          <a:solidFill>
+            <a:srgbClr val="2563EB"/>
+          </a:solidFill>
+          <a:ln>
+            <a:noFill/>
+          </a:ln>
+          <a:effectLst/>
+        </p:spPr>
+        <p:style>
+          <a:lnRef idx="1">
+            <a:schemeClr val="accent1"/>
+          </a:lnRef>
+          <a:fillRef idx="3">
+            <a:schemeClr val="accent1"/>
+          </a:fillRef>
+          <a:effectRef idx="2">
+            <a:schemeClr val="accent1"/>
+          </a:effectRef>
+          <a:fontRef idx="minor">
+            <a:schemeClr val="lt1"/>
+          </a:fontRef>
+        </p:style>
+        <p:txBody>
+          <a:bodyPr rtlCol="0" anchor="ctr"/>
+          <a:lstStyle/>
+          <a:p>
+            <a:pPr algn="ctr"/>
+          </a:p>
+        </p:txBody>
+      </p:sp>
+      <p:sp>
+        <p:nvSpPr>
+          <p:cNvPr id="15" name="TextBox 14"/>
+          <p:cNvSpPr txBox="1"/>
+          <p:nvPr/>
+        </p:nvSpPr>
+        <p:spPr>
+          <a:xfrm>
+            <a:off x="8001000" y="952500"/>
+            <a:ext cx="2552700" cy="1023937"/>
+          </a:xfrm>
+          <a:prstGeom prst="rect">
+            <a:avLst/>
+          </a:prstGeom>
+          <a:noFill/>
+        </p:spPr>
+        <p:txBody>
+          <a:bodyPr wrap="none" anchor="ctr">
+            <a:spAutoFit/>
+          </a:bodyPr>
+          <a:lstStyle/>
+          <a:p>
+            <a:pPr algn="l">
+              <a:lnSpc>
+                <a:spcPct val="115000"/>
+              </a:lnSpc>
+            </a:pPr>
+            <a:r>
+              <a:rPr sz="1300" b="1">
+                <a:solidFill>
+                  <a:srgbClr val="0B1D3A"/>
+                </a:solidFill>
+                <a:latin typeface="PingFang SC"/>
+              </a:rPr>
+              <a:t>决策</a:t>
+            </a:r>
+          </a:p>
+        </p:txBody>
+      </p:sp>
+      <p:cxnSp>
+        <p:nvCxnSpPr>
+          <p:cNvPr id="16" name="Connector 15"/>
+          <p:cNvCxnSpPr/>
+          <p:nvPr/>
+        </p:nvCxnSpPr>
+        <p:spPr>
+          <a:xfrm>
+            <a:off x="6096000" y="2033587"/>
+            <a:ext cx="0" cy="152400"/>
+          </a:xfrm>
+          <a:prstGeom prst="line">
+            <a:avLst/>
+          </a:prstGeom>
+          <a:ln w="17780">
+            <a:solidFill>
+              <a:srgbClr val="475569"/>
+            </a:solidFill>
+          </a:ln>
+        </p:spPr>
+        <p:style>
+          <a:lnRef idx="2">
+            <a:schemeClr val="accent1"/>
+          </a:lnRef>
+          <a:fillRef idx="0">
+            <a:schemeClr val="accent1"/>
+          </a:fillRef>
+          <a:effectRef idx="1">
+            <a:schemeClr val="accent1"/>
+          </a:effectRef>
+          <a:fontRef idx="minor">
+            <a:schemeClr val="tx1"/>
+          </a:fontRef>
+        </p:style>
+      </p:cxnSp>
+      <p:sp>
+        <p:nvSpPr>
+          <p:cNvPr id="17" name="Isosceles Triangle 16"/>
+          <p:cNvSpPr/>
+          <p:nvPr/>
+        </p:nvSpPr>
+        <p:spPr>
+          <a:xfrm rot="10800000">
+            <a:off x="6053138" y="2100263"/>
+            <a:ext cx="85725" cy="85725"/>
+          </a:xfrm>
+          <a:prstGeom prst="triangle">
+            <a:avLst/>
+          </a:prstGeom>
+          <a:solidFill>
+            <a:srgbClr val="475569"/>
+          </a:solidFill>
+          <a:ln>
+            <a:noFill/>
+          </a:ln>
+          <a:effectLst/>
+        </p:spPr>
+        <p:style>
+          <a:lnRef idx="1">
+            <a:schemeClr val="accent1"/>
+          </a:lnRef>
+          <a:fillRef idx="3">
+            <a:schemeClr val="accent1"/>
+          </a:fillRef>
+          <a:effectRef idx="2">
+            <a:schemeClr val="accent1"/>
+          </a:effectRef>
+          <a:fontRef idx="minor">
+            <a:schemeClr val="lt1"/>
+          </a:fontRef>
+        </p:style>
+        <p:txBody>
+          <a:bodyPr rtlCol="0" anchor="ctr"/>
+          <a:lstStyle/>
+          <a:p>
+            <a:pPr algn="ctr"/>
+          </a:p>
+        </p:txBody>
+      </p:sp>
+      <p:sp>
+        <p:nvSpPr>
+          <p:cNvPr id="18" name="Rounded Rectangle 17"/>
+          <p:cNvSpPr/>
+          <p:nvPr/>
+        </p:nvSpPr>
+        <p:spPr>
+          <a:xfrm>
+            <a:off x="5743575" y="2014537"/>
+            <a:ext cx="704850" cy="171450"/>
+          </a:xfrm>
+          <a:prstGeom prst="roundRect">
+            <a:avLst>
+              <a:gd name="adj" fmla="val 8000"/>
+            </a:avLst>
+          </a:prstGeom>
+          <a:solidFill>
+            <a:srgbClr val="FFFFFF"/>
+          </a:solidFill>
+          <a:ln w="12700">
+            <a:solidFill>
+              <a:srgbClr val="DDE5EE"/>
+            </a:solidFill>
+          </a:ln>
+          <a:effectLst/>
+        </p:spPr>
+        <p:style>
+          <a:lnRef idx="1">
+            <a:schemeClr val="accent1"/>
+          </a:lnRef>
+          <a:fillRef idx="3">
+            <a:schemeClr val="accent1"/>
+          </a:fillRef>
+          <a:effectRef idx="2">
+            <a:schemeClr val="accent1"/>
+          </a:effectRef>
+          <a:fontRef idx="minor">
+            <a:schemeClr val="lt1"/>
+          </a:fontRef>
+        </p:style>
+        <p:txBody>
+          <a:bodyPr rtlCol="0" anchor="ctr"/>
+          <a:lstStyle/>
+          <a:p>
+            <a:pPr algn="ctr"/>
+          </a:p>
+        </p:txBody>
+      </p:sp>
+      <p:sp>
+        <p:nvSpPr>
+          <p:cNvPr id="19" name="TextBox 18"/>
+          <p:cNvSpPr txBox="1"/>
+          <p:nvPr/>
+        </p:nvSpPr>
+        <p:spPr>
+          <a:xfrm>
+            <a:off x="5743575" y="2014537"/>
+            <a:ext cx="704850" cy="171450"/>
+          </a:xfrm>
+          <a:prstGeom prst="rect">
+            <a:avLst/>
+          </a:prstGeom>
+          <a:noFill/>
+        </p:spPr>
+        <p:txBody>
+          <a:bodyPr wrap="square" anchor="ctr">
+            <a:spAutoFit/>
+          </a:bodyPr>
+          <a:lstStyle/>
+          <a:p>
+            <a:pPr algn="ctr">
+              <a:lnSpc>
+                <a:spcPct val="100000"/>
+              </a:lnSpc>
+            </a:pPr>
+            <a:r>
+              <a:rPr sz="1100" b="1">
+                <a:solidFill>
+                  <a:srgbClr val="0B1D3A"/>
+                </a:solidFill>
+                <a:latin typeface="PingFang SC"/>
+              </a:rPr>
+              <a:t>拆解</a:t>
+            </a:r>
+          </a:p>
+        </p:txBody>
+      </p:sp>
+      <p:sp>
+        <p:nvSpPr>
+          <p:cNvPr id="20" name="Rounded Rectangle 19"/>
+          <p:cNvSpPr/>
+          <p:nvPr/>
+        </p:nvSpPr>
+        <p:spPr>
+          <a:xfrm>
+            <a:off x="1847850" y="2185987"/>
+            <a:ext cx="8877300" cy="1100137"/>
+          </a:xfrm>
+          <a:prstGeom prst="roundRect">
+            <a:avLst>
+              <a:gd name="adj" fmla="val 8000"/>
+            </a:avLst>
+          </a:prstGeom>
+          <a:solidFill>
+            <a:srgbClr val="F1F5F9"/>
+          </a:solidFill>
+          <a:ln>
+            <a:noFill/>
+          </a:ln>
+          <a:effectLst/>
+        </p:spPr>
+        <p:style>
+          <a:lnRef idx="1">
+            <a:schemeClr val="accent1"/>
+          </a:lnRef>
+          <a:fillRef idx="3">
+            <a:schemeClr val="accent1"/>
+          </a:fillRef>
+          <a:effectRef idx="2">
+            <a:schemeClr val="accent1"/>
+          </a:effectRef>
+          <a:fontRef idx="minor">
+            <a:schemeClr val="lt1"/>
+          </a:fontRef>
+        </p:style>
+        <p:txBody>
+          <a:bodyPr rtlCol="0" anchor="ctr"/>
+          <a:lstStyle/>
+          <a:p>
+            <a:pPr algn="ctr"/>
+          </a:p>
+        </p:txBody>
+      </p:sp>
+      <p:sp>
+        <p:nvSpPr>
+          <p:cNvPr id="21" name="TextBox 20"/>
+          <p:cNvSpPr txBox="1"/>
+          <p:nvPr/>
+        </p:nvSpPr>
+        <p:spPr>
+          <a:xfrm>
+            <a:off x="1962150" y="1957387"/>
+            <a:ext cx="1905000" cy="209550"/>
+          </a:xfrm>
+          <a:prstGeom prst="rect">
+            <a:avLst/>
+          </a:prstGeom>
+          <a:noFill/>
+        </p:spPr>
+        <p:txBody>
+          <a:bodyPr wrap="square" anchor="ctr">
+            <a:spAutoFit/>
+          </a:bodyPr>
+          <a:lstStyle/>
+          <a:p>
+            <a:pPr algn="l">
+              <a:lnSpc>
+                <a:spcPct val="100000"/>
+              </a:lnSpc>
+            </a:pPr>
+            <a:r>
+              <a:rPr sz="1100" b="1">
+                <a:solidFill>
+                  <a:srgbClr val="14B8A6"/>
+                </a:solidFill>
+                <a:latin typeface="PingFang SC"/>
+              </a:rPr>
+              <a:t>L2</a:t>
+            </a:r>
+          </a:p>
+        </p:txBody>
+      </p:sp>
+      <p:sp>
+        <p:nvSpPr>
+          <p:cNvPr id="22" name="Rounded Rectangle 21"/>
+          <p:cNvSpPr/>
+          <p:nvPr/>
+        </p:nvSpPr>
+        <p:spPr>
+          <a:xfrm>
+            <a:off x="1905000" y="2224087"/>
+            <a:ext cx="2076450" cy="1023937"/>
+          </a:xfrm>
+          <a:prstGeom prst="roundRect">
+            <a:avLst>
+              <a:gd name="adj" fmla="val 8000"/>
+            </a:avLst>
+          </a:prstGeom>
+          <a:solidFill>
+            <a:srgbClr val="FFFFFF"/>
+          </a:solidFill>
+          <a:ln w="12700">
+            <a:solidFill>
+              <a:srgbClr val="14B8A6"/>
+            </a:solidFill>
+          </a:ln>
+          <a:effectLst/>
+        </p:spPr>
+        <p:style>
+          <a:lnRef idx="1">
+            <a:schemeClr val="accent1"/>
+          </a:lnRef>
+          <a:fillRef idx="3">
+            <a:schemeClr val="accent1"/>
+          </a:fillRef>
+          <a:effectRef idx="2">
+            <a:schemeClr val="accent1"/>
+          </a:effectRef>
+          <a:fontRef idx="minor">
+            <a:schemeClr val="lt1"/>
+          </a:fontRef>
+        </p:style>
+        <p:txBody>
+          <a:bodyPr rtlCol="0" anchor="ctr"/>
+          <a:lstStyle/>
+          <a:p>
+            <a:pPr algn="ctr"/>
+          </a:p>
+        </p:txBody>
+      </p:sp>
+      <p:sp>
+        <p:nvSpPr>
+          <p:cNvPr id="23" name="Rectangle 22"/>
+          <p:cNvSpPr/>
+          <p:nvPr/>
+        </p:nvSpPr>
+        <p:spPr>
+          <a:xfrm>
+            <a:off x="1905000" y="2224087"/>
+            <a:ext cx="47625" cy="1023937"/>
+          </a:xfrm>
+          <a:prstGeom prst="rect">
+            <a:avLst/>
+          </a:prstGeom>
+          <a:solidFill>
+            <a:srgbClr val="14B8A6"/>
+          </a:solidFill>
+          <a:ln>
+            <a:noFill/>
+          </a:ln>
+          <a:effectLst/>
+        </p:spPr>
+        <p:style>
+          <a:lnRef idx="1">
+            <a:schemeClr val="accent1"/>
+          </a:lnRef>
+          <a:fillRef idx="3">
+            <a:schemeClr val="accent1"/>
+          </a:fillRef>
+          <a:effectRef idx="2">
+            <a:schemeClr val="accent1"/>
+          </a:effectRef>
+          <a:fontRef idx="minor">
+            <a:schemeClr val="lt1"/>
+          </a:fontRef>
+        </p:style>
+        <p:txBody>
+          <a:bodyPr rtlCol="0" anchor="ctr"/>
+          <a:lstStyle/>
+          <a:p>
+            <a:pPr algn="ctr"/>
+          </a:p>
+        </p:txBody>
+      </p:sp>
+      <p:sp>
+        <p:nvSpPr>
+          <p:cNvPr id="24" name="TextBox 23"/>
+          <p:cNvSpPr txBox="1"/>
+          <p:nvPr/>
+        </p:nvSpPr>
+        <p:spPr>
+          <a:xfrm>
+            <a:off x="2057400" y="2224087"/>
+            <a:ext cx="1809750" cy="1023937"/>
+          </a:xfrm>
+          <a:prstGeom prst="rect">
+            <a:avLst/>
+          </a:prstGeom>
+          <a:noFill/>
+        </p:spPr>
+        <p:txBody>
+          <a:bodyPr wrap="none" anchor="ctr">
+            <a:spAutoFit/>
+          </a:bodyPr>
+          <a:lstStyle/>
+          <a:p>
+            <a:pPr algn="l">
+              <a:lnSpc>
+                <a:spcPct val="115000"/>
+              </a:lnSpc>
+            </a:pPr>
+            <a:r>
+              <a:rPr sz="900" b="1">
+                <a:solidFill>
+                  <a:srgbClr val="0B1D3A"/>
+                </a:solidFill>
+                <a:latin typeface="PingFang SC"/>
+              </a:rPr>
+              <a:t>并行 Worker:Architecture</a:t>
+            </a:r>
+          </a:p>
+        </p:txBody>
+      </p:sp>
+      <p:sp>
+        <p:nvSpPr>
+          <p:cNvPr id="25" name="Rounded Rectangle 24"/>
+          <p:cNvSpPr/>
+          <p:nvPr/>
+        </p:nvSpPr>
+        <p:spPr>
+          <a:xfrm>
+            <a:off x="4133850" y="2224087"/>
+            <a:ext cx="2076450" cy="1023937"/>
+          </a:xfrm>
+          <a:prstGeom prst="roundRect">
+            <a:avLst>
+              <a:gd name="adj" fmla="val 8000"/>
+            </a:avLst>
+          </a:prstGeom>
+          <a:solidFill>
+            <a:srgbClr val="FFFFFF"/>
+          </a:solidFill>
+          <a:ln w="12700">
+            <a:solidFill>
+              <a:srgbClr val="14B8A6"/>
+            </a:solidFill>
+          </a:ln>
+          <a:effectLst/>
+        </p:spPr>
+        <p:style>
+          <a:lnRef idx="1">
+            <a:schemeClr val="accent1"/>
+          </a:lnRef>
+          <a:fillRef idx="3">
+            <a:schemeClr val="accent1"/>
+          </a:fillRef>
+          <a:effectRef idx="2">
+            <a:schemeClr val="accent1"/>
+          </a:effectRef>
+          <a:fontRef idx="minor">
+            <a:schemeClr val="lt1"/>
+          </a:fontRef>
+        </p:style>
+        <p:txBody>
+          <a:bodyPr rtlCol="0" anchor="ctr"/>
+          <a:lstStyle/>
+          <a:p>
+            <a:pPr algn="ctr"/>
+          </a:p>
+        </p:txBody>
+      </p:sp>
+      <p:sp>
+        <p:nvSpPr>
+          <p:cNvPr id="26" name="Rectangle 25"/>
+          <p:cNvSpPr/>
+          <p:nvPr/>
+        </p:nvSpPr>
+        <p:spPr>
+          <a:xfrm>
+            <a:off x="4133850" y="2224087"/>
+            <a:ext cx="47625" cy="1023937"/>
+          </a:xfrm>
+          <a:prstGeom prst="rect">
+            <a:avLst/>
+          </a:prstGeom>
+          <a:solidFill>
+            <a:srgbClr val="14B8A6"/>
+          </a:solidFill>
+          <a:ln>
+            <a:noFill/>
+          </a:ln>
+          <a:effectLst/>
+        </p:spPr>
+        <p:style>
+          <a:lnRef idx="1">
+            <a:schemeClr val="accent1"/>
+          </a:lnRef>
+          <a:fillRef idx="3">
+            <a:schemeClr val="accent1"/>
+          </a:fillRef>
+          <a:effectRef idx="2">
+            <a:schemeClr val="accent1"/>
+          </a:effectRef>
+          <a:fontRef idx="minor">
+            <a:schemeClr val="lt1"/>
+          </a:fontRef>
+        </p:style>
+        <p:txBody>
+          <a:bodyPr rtlCol="0" anchor="ctr"/>
+          <a:lstStyle/>
+          <a:p>
+            <a:pPr algn="ctr"/>
+          </a:p>
+        </p:txBody>
+      </p:sp>
+      <p:sp>
+        <p:nvSpPr>
+          <p:cNvPr id="27" name="TextBox 26"/>
+          <p:cNvSpPr txBox="1"/>
+          <p:nvPr/>
+        </p:nvSpPr>
+        <p:spPr>
+          <a:xfrm>
+            <a:off x="4286250" y="2224087"/>
+            <a:ext cx="1809750" cy="1023937"/>
+          </a:xfrm>
+          <a:prstGeom prst="rect">
+            <a:avLst/>
+          </a:prstGeom>
+          <a:noFill/>
+        </p:spPr>
+        <p:txBody>
+          <a:bodyPr wrap="none" anchor="ctr">
+            <a:spAutoFit/>
+          </a:bodyPr>
+          <a:lstStyle/>
+          <a:p>
+            <a:pPr algn="l">
+              <a:lnSpc>
+                <a:spcPct val="115000"/>
+              </a:lnSpc>
+            </a:pPr>
+            <a:r>
+              <a:rPr sz="1300" b="1">
+                <a:solidFill>
+                  <a:srgbClr val="0B1D3A"/>
+                </a:solidFill>
+                <a:latin typeface="PingFang SC"/>
+              </a:rPr>
+              <a:t>Test</a:t>
+            </a:r>
+          </a:p>
+        </p:txBody>
+      </p:sp>
+      <p:sp>
+        <p:nvSpPr>
+          <p:cNvPr id="28" name="Rounded Rectangle 27"/>
+          <p:cNvSpPr/>
+          <p:nvPr/>
+        </p:nvSpPr>
+        <p:spPr>
+          <a:xfrm>
+            <a:off x="6362700" y="2224087"/>
+            <a:ext cx="2076450" cy="1023937"/>
+          </a:xfrm>
+          <a:prstGeom prst="roundRect">
+            <a:avLst>
+              <a:gd name="adj" fmla="val 8000"/>
+            </a:avLst>
+          </a:prstGeom>
+          <a:solidFill>
+            <a:srgbClr val="FFFFFF"/>
+          </a:solidFill>
+          <a:ln w="12700">
+            <a:solidFill>
+              <a:srgbClr val="14B8A6"/>
+            </a:solidFill>
+          </a:ln>
+          <a:effectLst/>
+        </p:spPr>
+        <p:style>
+          <a:lnRef idx="1">
+            <a:schemeClr val="accent1"/>
+          </a:lnRef>
+          <a:fillRef idx="3">
+            <a:schemeClr val="accent1"/>
+          </a:fillRef>
+          <a:effectRef idx="2">
+            <a:schemeClr val="accent1"/>
+          </a:effectRef>
+          <a:fontRef idx="minor">
+            <a:schemeClr val="lt1"/>
+          </a:fontRef>
+        </p:style>
+        <p:txBody>
+          <a:bodyPr rtlCol="0" anchor="ctr"/>
+          <a:lstStyle/>
+          <a:p>
+            <a:pPr algn="ctr"/>
+          </a:p>
+        </p:txBody>
+      </p:sp>
+      <p:sp>
+        <p:nvSpPr>
+          <p:cNvPr id="29" name="Rectangle 28"/>
+          <p:cNvSpPr/>
+          <p:nvPr/>
+        </p:nvSpPr>
+        <p:spPr>
+          <a:xfrm>
+            <a:off x="6362700" y="2224087"/>
+            <a:ext cx="47625" cy="1023937"/>
+          </a:xfrm>
+          <a:prstGeom prst="rect">
+            <a:avLst/>
+          </a:prstGeom>
+          <a:solidFill>
+            <a:srgbClr val="14B8A6"/>
+          </a:solidFill>
+          <a:ln>
+            <a:noFill/>
+          </a:ln>
+          <a:effectLst/>
+        </p:spPr>
+        <p:style>
+          <a:lnRef idx="1">
+            <a:schemeClr val="accent1"/>
+          </a:lnRef>
+          <a:fillRef idx="3">
+            <a:schemeClr val="accent1"/>
+          </a:fillRef>
+          <a:effectRef idx="2">
+            <a:schemeClr val="accent1"/>
+          </a:effectRef>
+          <a:fontRef idx="minor">
+            <a:schemeClr val="lt1"/>
+          </a:fontRef>
+        </p:style>
+        <p:txBody>
+          <a:bodyPr rtlCol="0" anchor="ctr"/>
+          <a:lstStyle/>
+          <a:p>
+            <a:pPr algn="ctr"/>
+          </a:p>
+        </p:txBody>
+      </p:sp>
+      <p:sp>
+        <p:nvSpPr>
+          <p:cNvPr id="30" name="TextBox 29"/>
+          <p:cNvSpPr txBox="1"/>
+          <p:nvPr/>
+        </p:nvSpPr>
+        <p:spPr>
+          <a:xfrm>
+            <a:off x="6515100" y="2224087"/>
+            <a:ext cx="1809750" cy="1023937"/>
+          </a:xfrm>
+          <a:prstGeom prst="rect">
+            <a:avLst/>
+          </a:prstGeom>
+          <a:noFill/>
+        </p:spPr>
+        <p:txBody>
+          <a:bodyPr wrap="none" anchor="ctr">
+            <a:spAutoFit/>
+          </a:bodyPr>
+          <a:lstStyle/>
+          <a:p>
+            <a:pPr algn="l">
+              <a:lnSpc>
+                <a:spcPct val="115000"/>
+              </a:lnSpc>
+            </a:pPr>
+            <a:r>
+              <a:rPr sz="1300" b="1">
+                <a:solidFill>
+                  <a:srgbClr val="0B1D3A"/>
+                </a:solidFill>
+                <a:latin typeface="PingFang SC"/>
+              </a:rPr>
+              <a:t>Security</a:t>
+            </a:r>
+          </a:p>
+        </p:txBody>
+      </p:sp>
+      <p:sp>
+        <p:nvSpPr>
+          <p:cNvPr id="31" name="Rounded Rectangle 30"/>
+          <p:cNvSpPr/>
+          <p:nvPr/>
+        </p:nvSpPr>
+        <p:spPr>
+          <a:xfrm>
+            <a:off x="8591550" y="2224087"/>
+            <a:ext cx="2076450" cy="1023937"/>
+          </a:xfrm>
+          <a:prstGeom prst="roundRect">
+            <a:avLst>
+              <a:gd name="adj" fmla="val 8000"/>
+            </a:avLst>
+          </a:prstGeom>
+          <a:solidFill>
+            <a:srgbClr val="FFFFFF"/>
+          </a:solidFill>
+          <a:ln w="12700">
+            <a:solidFill>
+              <a:srgbClr val="14B8A6"/>
+            </a:solidFill>
+          </a:ln>
+          <a:effectLst/>
+        </p:spPr>
+        <p:style>
+          <a:lnRef idx="1">
+            <a:schemeClr val="accent1"/>
+          </a:lnRef>
+          <a:fillRef idx="3">
+            <a:schemeClr val="accent1"/>
+          </a:fillRef>
+          <a:effectRef idx="2">
+            <a:schemeClr val="accent1"/>
+          </a:effectRef>
+          <a:fontRef idx="minor">
+            <a:schemeClr val="lt1"/>
+          </a:fontRef>
+        </p:style>
+        <p:txBody>
+          <a:bodyPr rtlCol="0" anchor="ctr"/>
+          <a:lstStyle/>
+          <a:p>
+            <a:pPr algn="ctr"/>
+          </a:p>
+        </p:txBody>
+      </p:sp>
+      <p:sp>
+        <p:nvSpPr>
+          <p:cNvPr id="32" name="Rectangle 31"/>
+          <p:cNvSpPr/>
+          <p:nvPr/>
+        </p:nvSpPr>
+        <p:spPr>
+          <a:xfrm>
+            <a:off x="8591550" y="2224087"/>
+            <a:ext cx="47625" cy="1023937"/>
+          </a:xfrm>
+          <a:prstGeom prst="rect">
+            <a:avLst/>
+          </a:prstGeom>
+          <a:solidFill>
+            <a:srgbClr val="14B8A6"/>
+          </a:solidFill>
+          <a:ln>
+            <a:noFill/>
+          </a:ln>
+          <a:effectLst/>
+        </p:spPr>
+        <p:style>
+          <a:lnRef idx="1">
+            <a:schemeClr val="accent1"/>
+          </a:lnRef>
+          <a:fillRef idx="3">
+            <a:schemeClr val="accent1"/>
+          </a:fillRef>
+          <a:effectRef idx="2">
+            <a:schemeClr val="accent1"/>
+          </a:effectRef>
+          <a:fontRef idx="minor">
+            <a:schemeClr val="lt1"/>
+          </a:fontRef>
+        </p:style>
+        <p:txBody>
+          <a:bodyPr rtlCol="0" anchor="ctr"/>
+          <a:lstStyle/>
+          <a:p>
+            <a:pPr algn="ctr"/>
+          </a:p>
+        </p:txBody>
+      </p:sp>
+      <p:sp>
+        <p:nvSpPr>
+          <p:cNvPr id="33" name="TextBox 32"/>
+          <p:cNvSpPr txBox="1"/>
+          <p:nvPr/>
+        </p:nvSpPr>
+        <p:spPr>
+          <a:xfrm>
+            <a:off x="8743950" y="2224087"/>
+            <a:ext cx="1809750" cy="1023937"/>
+          </a:xfrm>
+          <a:prstGeom prst="rect">
+            <a:avLst/>
+          </a:prstGeom>
+          <a:noFill/>
+        </p:spPr>
+        <p:txBody>
+          <a:bodyPr wrap="none" anchor="ctr">
+            <a:spAutoFit/>
+          </a:bodyPr>
+          <a:lstStyle/>
+          <a:p>
+            <a:pPr algn="l">
+              <a:lnSpc>
+                <a:spcPct val="115000"/>
+              </a:lnSpc>
+            </a:pPr>
+            <a:r>
+              <a:rPr sz="1300" b="1">
+                <a:solidFill>
+                  <a:srgbClr val="0B1D3A"/>
+                </a:solidFill>
+                <a:latin typeface="PingFang SC"/>
+              </a:rPr>
+              <a:t>Performance</a:t>
+            </a:r>
+          </a:p>
+        </p:txBody>
+      </p:sp>
+      <p:cxnSp>
+        <p:nvCxnSpPr>
+          <p:cNvPr id="34" name="Connector 33"/>
+          <p:cNvCxnSpPr/>
+          <p:nvPr/>
+        </p:nvCxnSpPr>
+        <p:spPr>
+          <a:xfrm>
+            <a:off x="6096000" y="3305174"/>
+            <a:ext cx="0" cy="152400"/>
+          </a:xfrm>
+          <a:prstGeom prst="line">
+            <a:avLst/>
+          </a:prstGeom>
+          <a:ln w="17780">
+            <a:solidFill>
+              <a:srgbClr val="475569"/>
+            </a:solidFill>
+          </a:ln>
+        </p:spPr>
+        <p:style>
+          <a:lnRef idx="2">
+            <a:schemeClr val="accent1"/>
+          </a:lnRef>
+          <a:fillRef idx="0">
+            <a:schemeClr val="accent1"/>
+          </a:fillRef>
+          <a:effectRef idx="1">
+            <a:schemeClr val="accent1"/>
+          </a:effectRef>
+          <a:fontRef idx="minor">
+            <a:schemeClr val="tx1"/>
+          </a:fontRef>
+        </p:style>
+      </p:cxnSp>
+      <p:sp>
+        <p:nvSpPr>
+          <p:cNvPr id="35" name="Isosceles Triangle 34"/>
+          <p:cNvSpPr/>
+          <p:nvPr/>
+        </p:nvSpPr>
+        <p:spPr>
+          <a:xfrm rot="10800000">
+            <a:off x="6053138" y="3371850"/>
+            <a:ext cx="85725" cy="85725"/>
+          </a:xfrm>
+          <a:prstGeom prst="triangle">
+            <a:avLst/>
+          </a:prstGeom>
+          <a:solidFill>
+            <a:srgbClr val="475569"/>
+          </a:solidFill>
+          <a:ln>
+            <a:noFill/>
+          </a:ln>
+          <a:effectLst/>
+        </p:spPr>
+        <p:style>
+          <a:lnRef idx="1">
+            <a:schemeClr val="accent1"/>
+          </a:lnRef>
+          <a:fillRef idx="3">
+            <a:schemeClr val="accent1"/>
+          </a:fillRef>
+          <a:effectRef idx="2">
+            <a:schemeClr val="accent1"/>
+          </a:effectRef>
+          <a:fontRef idx="minor">
+            <a:schemeClr val="lt1"/>
+          </a:fontRef>
+        </p:style>
+        <p:txBody>
+          <a:bodyPr rtlCol="0" anchor="ctr"/>
+          <a:lstStyle/>
+          <a:p>
+            <a:pPr algn="ctr"/>
+          </a:p>
+        </p:txBody>
+      </p:sp>
+      <p:sp>
+        <p:nvSpPr>
+          <p:cNvPr id="36" name="Rounded Rectangle 35"/>
+          <p:cNvSpPr/>
+          <p:nvPr/>
+        </p:nvSpPr>
+        <p:spPr>
+          <a:xfrm>
+            <a:off x="5553075" y="3286124"/>
+            <a:ext cx="1085850" cy="171450"/>
+          </a:xfrm>
+          <a:prstGeom prst="roundRect">
+            <a:avLst>
+              <a:gd name="adj" fmla="val 8000"/>
+            </a:avLst>
+          </a:prstGeom>
+          <a:solidFill>
+            <a:srgbClr val="FFFFFF"/>
+          </a:solidFill>
+          <a:ln w="12700">
+            <a:solidFill>
+              <a:srgbClr val="DDE5EE"/>
+            </a:solidFill>
+          </a:ln>
+          <a:effectLst/>
+        </p:spPr>
+        <p:style>
+          <a:lnRef idx="1">
+            <a:schemeClr val="accent1"/>
+          </a:lnRef>
+          <a:fillRef idx="3">
+            <a:schemeClr val="accent1"/>
+          </a:fillRef>
+          <a:effectRef idx="2">
+            <a:schemeClr val="accent1"/>
+          </a:effectRef>
+          <a:fontRef idx="minor">
+            <a:schemeClr val="lt1"/>
+          </a:fontRef>
+        </p:style>
+        <p:txBody>
+          <a:bodyPr rtlCol="0" anchor="ctr"/>
+          <a:lstStyle/>
+          <a:p>
+            <a:pPr algn="ctr"/>
+          </a:p>
+        </p:txBody>
+      </p:sp>
+      <p:sp>
+        <p:nvSpPr>
+          <p:cNvPr id="37" name="TextBox 36"/>
+          <p:cNvSpPr txBox="1"/>
+          <p:nvPr/>
+        </p:nvSpPr>
+        <p:spPr>
+          <a:xfrm>
+            <a:off x="5553075" y="3286124"/>
+            <a:ext cx="1085850" cy="171450"/>
+          </a:xfrm>
+          <a:prstGeom prst="rect">
+            <a:avLst/>
+          </a:prstGeom>
+          <a:noFill/>
+        </p:spPr>
+        <p:txBody>
+          <a:bodyPr wrap="square" anchor="ctr">
+            <a:spAutoFit/>
+          </a:bodyPr>
+          <a:lstStyle/>
+          <a:p>
+            <a:pPr algn="ctr">
+              <a:lnSpc>
+                <a:spcPct val="100000"/>
+              </a:lnSpc>
+            </a:pPr>
+            <a:r>
+              <a:rPr sz="1100" b="1">
+                <a:solidFill>
+                  <a:srgbClr val="0B1D3A"/>
+                </a:solidFill>
+                <a:latin typeface="PingFang SC"/>
+              </a:rPr>
+              <a:t>并行执行</a:t>
+            </a:r>
+          </a:p>
+        </p:txBody>
+      </p:sp>
+      <p:sp>
+        <p:nvSpPr>
+          <p:cNvPr id="38" name="Rounded Rectangle 37"/>
+          <p:cNvSpPr/>
+          <p:nvPr/>
+        </p:nvSpPr>
+        <p:spPr>
+          <a:xfrm>
+            <a:off x="1847850" y="3457574"/>
+            <a:ext cx="8877300" cy="1100137"/>
+          </a:xfrm>
+          <a:prstGeom prst="roundRect">
+            <a:avLst>
+              <a:gd name="adj" fmla="val 8000"/>
+            </a:avLst>
+          </a:prstGeom>
+          <a:solidFill>
+            <a:srgbClr val="F1F5F9"/>
+          </a:solidFill>
+          <a:ln>
+            <a:noFill/>
+          </a:ln>
+          <a:effectLst/>
+        </p:spPr>
+        <p:style>
+          <a:lnRef idx="1">
+            <a:schemeClr val="accent1"/>
+          </a:lnRef>
+          <a:fillRef idx="3">
+            <a:schemeClr val="accent1"/>
+          </a:fillRef>
+          <a:effectRef idx="2">
+            <a:schemeClr val="accent1"/>
+          </a:effectRef>
+          <a:fontRef idx="minor">
+            <a:schemeClr val="lt1"/>
+          </a:fontRef>
+        </p:style>
+        <p:txBody>
+          <a:bodyPr rtlCol="0" anchor="ctr"/>
+          <a:lstStyle/>
+          <a:p>
+            <a:pPr algn="ctr"/>
+          </a:p>
+        </p:txBody>
+      </p:sp>
+      <p:sp>
+        <p:nvSpPr>
+          <p:cNvPr id="39" name="TextBox 38"/>
+          <p:cNvSpPr txBox="1"/>
+          <p:nvPr/>
+        </p:nvSpPr>
+        <p:spPr>
+          <a:xfrm>
+            <a:off x="1962150" y="3228974"/>
+            <a:ext cx="1905000" cy="209550"/>
+          </a:xfrm>
+          <a:prstGeom prst="rect">
+            <a:avLst/>
+          </a:prstGeom>
+          <a:noFill/>
+        </p:spPr>
+        <p:txBody>
+          <a:bodyPr wrap="square" anchor="ctr">
+            <a:spAutoFit/>
+          </a:bodyPr>
+          <a:lstStyle/>
+          <a:p>
+            <a:pPr algn="l">
+              <a:lnSpc>
+                <a:spcPct val="100000"/>
+              </a:lnSpc>
+            </a:pPr>
+            <a:r>
+              <a:rPr sz="1100" b="1">
+                <a:solidFill>
+                  <a:srgbClr val="8B5CF6"/>
+                </a:solidFill>
+                <a:latin typeface="PingFang SC"/>
+              </a:rPr>
+              <a:t>L3</a:t>
+            </a:r>
+          </a:p>
+        </p:txBody>
+      </p:sp>
+      <p:sp>
+        <p:nvSpPr>
+          <p:cNvPr id="40" name="Rounded Rectangle 39"/>
+          <p:cNvSpPr/>
+          <p:nvPr/>
+        </p:nvSpPr>
+        <p:spPr>
+          <a:xfrm>
+            <a:off x="1905000" y="3495674"/>
+            <a:ext cx="2819400" cy="1023937"/>
+          </a:xfrm>
+          <a:prstGeom prst="roundRect">
+            <a:avLst>
+              <a:gd name="adj" fmla="val 8000"/>
+            </a:avLst>
+          </a:prstGeom>
+          <a:solidFill>
+            <a:srgbClr val="FFFFFF"/>
+          </a:solidFill>
+          <a:ln w="12700">
+            <a:solidFill>
+              <a:srgbClr val="8B5CF6"/>
+            </a:solidFill>
+          </a:ln>
+          <a:effectLst/>
+        </p:spPr>
+        <p:style>
+          <a:lnRef idx="1">
+            <a:schemeClr val="accent1"/>
+          </a:lnRef>
+          <a:fillRef idx="3">
+            <a:schemeClr val="accent1"/>
+          </a:fillRef>
+          <a:effectRef idx="2">
+            <a:schemeClr val="accent1"/>
+          </a:effectRef>
+          <a:fontRef idx="minor">
+            <a:schemeClr val="lt1"/>
+          </a:fontRef>
+        </p:style>
+        <p:txBody>
+          <a:bodyPr rtlCol="0" anchor="ctr"/>
+          <a:lstStyle/>
+          <a:p>
+            <a:pPr algn="ctr"/>
+          </a:p>
+        </p:txBody>
+      </p:sp>
+      <p:sp>
+        <p:nvSpPr>
+          <p:cNvPr id="41" name="Rectangle 40"/>
+          <p:cNvSpPr/>
+          <p:nvPr/>
+        </p:nvSpPr>
+        <p:spPr>
+          <a:xfrm>
+            <a:off x="1905000" y="3495674"/>
+            <a:ext cx="47625" cy="1023937"/>
+          </a:xfrm>
+          <a:prstGeom prst="rect">
+            <a:avLst/>
+          </a:prstGeom>
+          <a:solidFill>
+            <a:srgbClr val="8B5CF6"/>
+          </a:solidFill>
+          <a:ln>
+            <a:noFill/>
+          </a:ln>
+          <a:effectLst/>
+        </p:spPr>
+        <p:style>
+          <a:lnRef idx="1">
+            <a:schemeClr val="accent1"/>
+          </a:lnRef>
+          <a:fillRef idx="3">
+            <a:schemeClr val="accent1"/>
+          </a:fillRef>
+          <a:effectRef idx="2">
+            <a:schemeClr val="accent1"/>
+          </a:effectRef>
+          <a:fontRef idx="minor">
+            <a:schemeClr val="lt1"/>
+          </a:fontRef>
+        </p:style>
+        <p:txBody>
+          <a:bodyPr rtlCol="0" anchor="ctr"/>
+          <a:lstStyle/>
+          <a:p>
+            <a:pPr algn="ctr"/>
+          </a:p>
+        </p:txBody>
+      </p:sp>
+      <p:sp>
+        <p:nvSpPr>
+          <p:cNvPr id="42" name="TextBox 41"/>
+          <p:cNvSpPr txBox="1"/>
+          <p:nvPr/>
+        </p:nvSpPr>
+        <p:spPr>
+          <a:xfrm>
+            <a:off x="2057400" y="3495674"/>
+            <a:ext cx="2552700" cy="1023937"/>
+          </a:xfrm>
+          <a:prstGeom prst="rect">
+            <a:avLst/>
+          </a:prstGeom>
+          <a:noFill/>
+        </p:spPr>
+        <p:txBody>
+          <a:bodyPr wrap="none" anchor="ctr">
+            <a:spAutoFit/>
+          </a:bodyPr>
+          <a:lstStyle/>
+          <a:p>
+            <a:pPr algn="l">
+              <a:lnSpc>
+                <a:spcPct val="115000"/>
+              </a:lnSpc>
+            </a:pPr>
+            <a:r>
+              <a:rPr sz="1300" b="1">
+                <a:solidFill>
+                  <a:srgbClr val="0B1D3A"/>
+                </a:solidFill>
+                <a:latin typeface="PingFang SC"/>
+              </a:rPr>
+              <a:t>支撑:结果聚合</a:t>
+            </a:r>
+          </a:p>
+        </p:txBody>
+      </p:sp>
+      <p:sp>
+        <p:nvSpPr>
+          <p:cNvPr id="43" name="Rounded Rectangle 42"/>
+          <p:cNvSpPr/>
+          <p:nvPr/>
+        </p:nvSpPr>
+        <p:spPr>
+          <a:xfrm>
+            <a:off x="4876800" y="3495674"/>
+            <a:ext cx="2819400" cy="1023937"/>
+          </a:xfrm>
+          <a:prstGeom prst="roundRect">
+            <a:avLst>
+              <a:gd name="adj" fmla="val 8000"/>
+            </a:avLst>
+          </a:prstGeom>
+          <a:solidFill>
+            <a:srgbClr val="FFFFFF"/>
+          </a:solidFill>
+          <a:ln w="12700">
+            <a:solidFill>
+              <a:srgbClr val="8B5CF6"/>
+            </a:solidFill>
+          </a:ln>
+          <a:effectLst/>
+        </p:spPr>
+        <p:style>
+          <a:lnRef idx="1">
+            <a:schemeClr val="accent1"/>
+          </a:lnRef>
+          <a:fillRef idx="3">
+            <a:schemeClr val="accent1"/>
+          </a:fillRef>
+          <a:effectRef idx="2">
+            <a:schemeClr val="accent1"/>
+          </a:effectRef>
+          <a:fontRef idx="minor">
+            <a:schemeClr val="lt1"/>
+          </a:fontRef>
+        </p:style>
+        <p:txBody>
+          <a:bodyPr rtlCol="0" anchor="ctr"/>
+          <a:lstStyle/>
+          <a:p>
+            <a:pPr algn="ctr"/>
+          </a:p>
+        </p:txBody>
+      </p:sp>
+      <p:sp>
+        <p:nvSpPr>
+          <p:cNvPr id="44" name="Rectangle 43"/>
+          <p:cNvSpPr/>
+          <p:nvPr/>
+        </p:nvSpPr>
+        <p:spPr>
+          <a:xfrm>
+            <a:off x="4876800" y="3495674"/>
+            <a:ext cx="47625" cy="1023937"/>
+          </a:xfrm>
+          <a:prstGeom prst="rect">
+            <a:avLst/>
+          </a:prstGeom>
+          <a:solidFill>
+            <a:srgbClr val="8B5CF6"/>
+          </a:solidFill>
+          <a:ln>
+            <a:noFill/>
+          </a:ln>
+          <a:effectLst/>
+        </p:spPr>
+        <p:style>
+          <a:lnRef idx="1">
+            <a:schemeClr val="accent1"/>
+          </a:lnRef>
+          <a:fillRef idx="3">
+            <a:schemeClr val="accent1"/>
+          </a:fillRef>
+          <a:effectRef idx="2">
+            <a:schemeClr val="accent1"/>
+          </a:effectRef>
+          <a:fontRef idx="minor">
+            <a:schemeClr val="lt1"/>
+          </a:fontRef>
+        </p:style>
+        <p:txBody>
+          <a:bodyPr rtlCol="0" anchor="ctr"/>
+          <a:lstStyle/>
+          <a:p>
+            <a:pPr algn="ctr"/>
+          </a:p>
+        </p:txBody>
+      </p:sp>
+      <p:sp>
+        <p:nvSpPr>
+          <p:cNvPr id="45" name="TextBox 44"/>
+          <p:cNvSpPr txBox="1"/>
+          <p:nvPr/>
+        </p:nvSpPr>
+        <p:spPr>
+          <a:xfrm>
+            <a:off x="5029200" y="3495674"/>
+            <a:ext cx="2552700" cy="1023937"/>
+          </a:xfrm>
+          <a:prstGeom prst="rect">
+            <a:avLst/>
+          </a:prstGeom>
+          <a:noFill/>
+        </p:spPr>
+        <p:txBody>
+          <a:bodyPr wrap="none" anchor="ctr">
+            <a:spAutoFit/>
+          </a:bodyPr>
+          <a:lstStyle/>
+          <a:p>
+            <a:pPr algn="l">
+              <a:lnSpc>
+                <a:spcPct val="115000"/>
+              </a:lnSpc>
+            </a:pPr>
+            <a:r>
+              <a:rPr sz="1300" b="1">
+                <a:solidFill>
+                  <a:srgbClr val="0B1D3A"/>
+                </a:solidFill>
+                <a:latin typeface="PingFang SC"/>
+              </a:rPr>
+              <a:t>冲突仲裁</a:t>
+            </a:r>
+          </a:p>
+        </p:txBody>
+      </p:sp>
+      <p:sp>
+        <p:nvSpPr>
+          <p:cNvPr id="46" name="Rounded Rectangle 45"/>
+          <p:cNvSpPr/>
+          <p:nvPr/>
+        </p:nvSpPr>
+        <p:spPr>
+          <a:xfrm>
+            <a:off x="7848600" y="3495674"/>
+            <a:ext cx="2819400" cy="1023937"/>
+          </a:xfrm>
+          <a:prstGeom prst="roundRect">
+            <a:avLst>
+              <a:gd name="adj" fmla="val 8000"/>
+            </a:avLst>
+          </a:prstGeom>
+          <a:solidFill>
+            <a:srgbClr val="FFFFFF"/>
+          </a:solidFill>
+          <a:ln w="12700">
+            <a:solidFill>
+              <a:srgbClr val="8B5CF6"/>
+            </a:solidFill>
+          </a:ln>
+          <a:effectLst/>
+        </p:spPr>
+        <p:style>
+          <a:lnRef idx="1">
+            <a:schemeClr val="accent1"/>
+          </a:lnRef>
+          <a:fillRef idx="3">
+            <a:schemeClr val="accent1"/>
+          </a:fillRef>
+          <a:effectRef idx="2">
+            <a:schemeClr val="accent1"/>
+          </a:effectRef>
+          <a:fontRef idx="minor">
+            <a:schemeClr val="lt1"/>
+          </a:fontRef>
+        </p:style>
+        <p:txBody>
+          <a:bodyPr rtlCol="0" anchor="ctr"/>
+          <a:lstStyle/>
+          <a:p>
+            <a:pPr algn="ctr"/>
+          </a:p>
+        </p:txBody>
+      </p:sp>
+      <p:sp>
+        <p:nvSpPr>
+          <p:cNvPr id="47" name="Rectangle 46"/>
+          <p:cNvSpPr/>
+          <p:nvPr/>
+        </p:nvSpPr>
+        <p:spPr>
+          <a:xfrm>
+            <a:off x="7848600" y="3495674"/>
+            <a:ext cx="47625" cy="1023937"/>
+          </a:xfrm>
+          <a:prstGeom prst="rect">
+            <a:avLst/>
+          </a:prstGeom>
+          <a:solidFill>
+            <a:srgbClr val="8B5CF6"/>
+          </a:solidFill>
+          <a:ln>
+            <a:noFill/>
+          </a:ln>
+          <a:effectLst/>
+        </p:spPr>
+        <p:style>
+          <a:lnRef idx="1">
+            <a:schemeClr val="accent1"/>
+          </a:lnRef>
+          <a:fillRef idx="3">
+            <a:schemeClr val="accent1"/>
+          </a:fillRef>
+          <a:effectRef idx="2">
+            <a:schemeClr val="accent1"/>
+          </a:effectRef>
+          <a:fontRef idx="minor">
+            <a:schemeClr val="lt1"/>
+          </a:fontRef>
+        </p:style>
+        <p:txBody>
+          <a:bodyPr rtlCol="0" anchor="ctr"/>
+          <a:lstStyle/>
+          <a:p>
+            <a:pPr algn="ctr"/>
+          </a:p>
+        </p:txBody>
+      </p:sp>
+      <p:sp>
+        <p:nvSpPr>
+          <p:cNvPr id="48" name="TextBox 47"/>
+          <p:cNvSpPr txBox="1"/>
+          <p:nvPr/>
+        </p:nvSpPr>
+        <p:spPr>
+          <a:xfrm>
+            <a:off x="8001000" y="3495674"/>
+            <a:ext cx="2552700" cy="1023937"/>
+          </a:xfrm>
+          <a:prstGeom prst="rect">
+            <a:avLst/>
+          </a:prstGeom>
+          <a:noFill/>
+        </p:spPr>
+        <p:txBody>
+          <a:bodyPr wrap="none" anchor="ctr">
+            <a:spAutoFit/>
+          </a:bodyPr>
+          <a:lstStyle/>
+          <a:p>
+            <a:pPr algn="l">
+              <a:lnSpc>
+                <a:spcPct val="115000"/>
+              </a:lnSpc>
+            </a:pPr>
+            <a:r>
+              <a:rPr sz="1300" b="1">
+                <a:solidFill>
+                  <a:srgbClr val="0B1D3A"/>
+                </a:solidFill>
+                <a:latin typeface="PingFang SC"/>
+              </a:rPr>
+              <a:t>证据保留</a:t>
+            </a:r>
+          </a:p>
+        </p:txBody>
+      </p:sp>
+      <p:cxnSp>
+        <p:nvCxnSpPr>
+          <p:cNvPr id="49" name="Connector 48"/>
+          <p:cNvCxnSpPr/>
+          <p:nvPr/>
+        </p:nvCxnSpPr>
+        <p:spPr>
+          <a:xfrm>
+            <a:off x="6096000" y="4576761"/>
+            <a:ext cx="0" cy="152400"/>
+          </a:xfrm>
+          <a:prstGeom prst="line">
+            <a:avLst/>
+          </a:prstGeom>
+          <a:ln w="17780">
+            <a:solidFill>
+              <a:srgbClr val="475569"/>
+            </a:solidFill>
+          </a:ln>
+        </p:spPr>
+        <p:style>
+          <a:lnRef idx="2">
+            <a:schemeClr val="accent1"/>
+          </a:lnRef>
+          <a:fillRef idx="0">
+            <a:schemeClr val="accent1"/>
+          </a:fillRef>
+          <a:effectRef idx="1">
+            <a:schemeClr val="accent1"/>
+          </a:effectRef>
+          <a:fontRef idx="minor">
+            <a:schemeClr val="tx1"/>
+          </a:fontRef>
+        </p:style>
+      </p:cxnSp>
+      <p:sp>
+        <p:nvSpPr>
+          <p:cNvPr id="50" name="Isosceles Triangle 49"/>
+          <p:cNvSpPr/>
+          <p:nvPr/>
+        </p:nvSpPr>
+        <p:spPr>
+          <a:xfrm rot="10800000">
+            <a:off x="6053138" y="4643437"/>
+            <a:ext cx="85725" cy="85725"/>
+          </a:xfrm>
+          <a:prstGeom prst="triangle">
+            <a:avLst/>
+          </a:prstGeom>
+          <a:solidFill>
+            <a:srgbClr val="475569"/>
+          </a:solidFill>
+          <a:ln>
+            <a:noFill/>
+          </a:ln>
+          <a:effectLst/>
+        </p:spPr>
+        <p:style>
+          <a:lnRef idx="1">
+            <a:schemeClr val="accent1"/>
+          </a:lnRef>
+          <a:fillRef idx="3">
+            <a:schemeClr val="accent1"/>
+          </a:fillRef>
+          <a:effectRef idx="2">
+            <a:schemeClr val="accent1"/>
+          </a:effectRef>
+          <a:fontRef idx="minor">
+            <a:schemeClr val="lt1"/>
+          </a:fontRef>
+        </p:style>
+        <p:txBody>
+          <a:bodyPr rtlCol="0" anchor="ctr"/>
+          <a:lstStyle/>
+          <a:p>
+            <a:pPr algn="ctr"/>
+          </a:p>
+        </p:txBody>
+      </p:sp>
+      <p:sp>
+        <p:nvSpPr>
+          <p:cNvPr id="51" name="Rounded Rectangle 50"/>
+          <p:cNvSpPr/>
+          <p:nvPr/>
+        </p:nvSpPr>
+        <p:spPr>
+          <a:xfrm>
+            <a:off x="5553075" y="4557711"/>
+            <a:ext cx="1085850" cy="171450"/>
+          </a:xfrm>
+          <a:prstGeom prst="roundRect">
+            <a:avLst>
+              <a:gd name="adj" fmla="val 8000"/>
+            </a:avLst>
+          </a:prstGeom>
+          <a:solidFill>
+            <a:srgbClr val="FFFFFF"/>
+          </a:solidFill>
+          <a:ln w="12700">
+            <a:solidFill>
+              <a:srgbClr val="DDE5EE"/>
+            </a:solidFill>
+          </a:ln>
+          <a:effectLst/>
+        </p:spPr>
+        <p:style>
+          <a:lnRef idx="1">
+            <a:schemeClr val="accent1"/>
+          </a:lnRef>
+          <a:fillRef idx="3">
+            <a:schemeClr val="accent1"/>
+          </a:fillRef>
+          <a:effectRef idx="2">
+            <a:schemeClr val="accent1"/>
+          </a:effectRef>
+          <a:fontRef idx="minor">
+            <a:schemeClr val="lt1"/>
+          </a:fontRef>
+        </p:style>
+        <p:txBody>
+          <a:bodyPr rtlCol="0" anchor="ctr"/>
+          <a:lstStyle/>
+          <a:p>
+            <a:pPr algn="ctr"/>
+          </a:p>
+        </p:txBody>
+      </p:sp>
+      <p:sp>
+        <p:nvSpPr>
+          <p:cNvPr id="52" name="TextBox 51"/>
+          <p:cNvSpPr txBox="1"/>
+          <p:nvPr/>
+        </p:nvSpPr>
+        <p:spPr>
+          <a:xfrm>
+            <a:off x="5553075" y="4557711"/>
+            <a:ext cx="1085850" cy="171450"/>
+          </a:xfrm>
+          <a:prstGeom prst="rect">
+            <a:avLst/>
+          </a:prstGeom>
+          <a:noFill/>
+        </p:spPr>
+        <p:txBody>
+          <a:bodyPr wrap="square" anchor="ctr">
+            <a:spAutoFit/>
+          </a:bodyPr>
+          <a:lstStyle/>
+          <a:p>
+            <a:pPr algn="ctr">
+              <a:lnSpc>
+                <a:spcPct val="100000"/>
+              </a:lnSpc>
+            </a:pPr>
+            <a:r>
+              <a:rPr sz="1100" b="1">
+                <a:solidFill>
+                  <a:srgbClr val="0B1D3A"/>
+                </a:solidFill>
+                <a:latin typeface="PingFang SC"/>
+              </a:rPr>
+              <a:t>聚合仲裁</a:t>
+            </a:r>
+          </a:p>
+        </p:txBody>
+      </p:sp>
+      <p:sp>
+        <p:nvSpPr>
+          <p:cNvPr id="53" name="Rounded Rectangle 52"/>
+          <p:cNvSpPr/>
+          <p:nvPr/>
+        </p:nvSpPr>
+        <p:spPr>
+          <a:xfrm>
+            <a:off x="1847850" y="4729161"/>
+            <a:ext cx="8877300" cy="1100137"/>
+          </a:xfrm>
+          <a:prstGeom prst="roundRect">
+            <a:avLst>
+              <a:gd name="adj" fmla="val 8000"/>
+            </a:avLst>
+          </a:prstGeom>
+          <a:solidFill>
+            <a:srgbClr val="F1F5F9"/>
+          </a:solidFill>
+          <a:ln>
+            <a:noFill/>
+          </a:ln>
+          <a:effectLst/>
+        </p:spPr>
+        <p:style>
+          <a:lnRef idx="1">
+            <a:schemeClr val="accent1"/>
+          </a:lnRef>
+          <a:fillRef idx="3">
+            <a:schemeClr val="accent1"/>
+          </a:fillRef>
+          <a:effectRef idx="2">
+            <a:schemeClr val="accent1"/>
+          </a:effectRef>
+          <a:fontRef idx="minor">
+            <a:schemeClr val="lt1"/>
+          </a:fontRef>
+        </p:style>
+        <p:txBody>
+          <a:bodyPr rtlCol="0" anchor="ctr"/>
+          <a:lstStyle/>
+          <a:p>
+            <a:pPr algn="ctr"/>
+          </a:p>
+        </p:txBody>
+      </p:sp>
+      <p:sp>
+        <p:nvSpPr>
+          <p:cNvPr id="54" name="TextBox 53"/>
+          <p:cNvSpPr txBox="1"/>
+          <p:nvPr/>
+        </p:nvSpPr>
+        <p:spPr>
+          <a:xfrm>
+            <a:off x="1962150" y="4500561"/>
+            <a:ext cx="1905000" cy="209550"/>
+          </a:xfrm>
+          <a:prstGeom prst="rect">
+            <a:avLst/>
+          </a:prstGeom>
+          <a:noFill/>
+        </p:spPr>
+        <p:txBody>
+          <a:bodyPr wrap="square" anchor="ctr">
+            <a:spAutoFit/>
+          </a:bodyPr>
+          <a:lstStyle/>
+          <a:p>
+            <a:pPr algn="l">
+              <a:lnSpc>
+                <a:spcPct val="100000"/>
+              </a:lnSpc>
+            </a:pPr>
+            <a:r>
+              <a:rPr sz="1100" b="1">
+                <a:solidFill>
+                  <a:srgbClr val="F59E0B"/>
+                </a:solidFill>
+                <a:latin typeface="PingFang SC"/>
+              </a:rPr>
+              <a:t>L4</a:t>
+            </a:r>
+          </a:p>
+        </p:txBody>
+      </p:sp>
+      <p:sp>
+        <p:nvSpPr>
+          <p:cNvPr id="55" name="Rounded Rectangle 54"/>
+          <p:cNvSpPr/>
+          <p:nvPr/>
+        </p:nvSpPr>
+        <p:spPr>
+          <a:xfrm>
+            <a:off x="1905000" y="4767261"/>
+            <a:ext cx="4305300" cy="1023937"/>
+          </a:xfrm>
+          <a:prstGeom prst="roundRect">
+            <a:avLst>
+              <a:gd name="adj" fmla="val 8000"/>
+            </a:avLst>
+          </a:prstGeom>
+          <a:solidFill>
+            <a:srgbClr val="FFFFFF"/>
+          </a:solidFill>
+          <a:ln w="12700">
+            <a:solidFill>
+              <a:srgbClr val="F59E0B"/>
+            </a:solidFill>
+          </a:ln>
+          <a:effectLst/>
+        </p:spPr>
+        <p:style>
+          <a:lnRef idx="1">
+            <a:schemeClr val="accent1"/>
+          </a:lnRef>
+          <a:fillRef idx="3">
+            <a:schemeClr val="accent1"/>
+          </a:fillRef>
+          <a:effectRef idx="2">
+            <a:schemeClr val="accent1"/>
+          </a:effectRef>
+          <a:fontRef idx="minor">
+            <a:schemeClr val="lt1"/>
+          </a:fontRef>
+        </p:style>
+        <p:txBody>
+          <a:bodyPr rtlCol="0" anchor="ctr"/>
+          <a:lstStyle/>
+          <a:p>
+            <a:pPr algn="ctr"/>
+          </a:p>
+        </p:txBody>
+      </p:sp>
+      <p:sp>
+        <p:nvSpPr>
+          <p:cNvPr id="56" name="Rectangle 55"/>
+          <p:cNvSpPr/>
+          <p:nvPr/>
+        </p:nvSpPr>
+        <p:spPr>
+          <a:xfrm>
+            <a:off x="1905000" y="4767261"/>
+            <a:ext cx="47625" cy="1023937"/>
+          </a:xfrm>
+          <a:prstGeom prst="rect">
+            <a:avLst/>
+          </a:prstGeom>
+          <a:solidFill>
+            <a:srgbClr val="F59E0B"/>
+          </a:solidFill>
+          <a:ln>
+            <a:noFill/>
+          </a:ln>
+          <a:effectLst/>
+        </p:spPr>
+        <p:style>
+          <a:lnRef idx="1">
+            <a:schemeClr val="accent1"/>
+          </a:lnRef>
+          <a:fillRef idx="3">
+            <a:schemeClr val="accent1"/>
+          </a:fillRef>
+          <a:effectRef idx="2">
+            <a:schemeClr val="accent1"/>
+          </a:effectRef>
+          <a:fontRef idx="minor">
+            <a:schemeClr val="lt1"/>
+          </a:fontRef>
+        </p:style>
+        <p:txBody>
+          <a:bodyPr rtlCol="0" anchor="ctr"/>
+          <a:lstStyle/>
+          <a:p>
+            <a:pPr algn="ctr"/>
+          </a:p>
+        </p:txBody>
+      </p:sp>
+      <p:sp>
+        <p:nvSpPr>
+          <p:cNvPr id="57" name="TextBox 56"/>
+          <p:cNvSpPr txBox="1"/>
+          <p:nvPr/>
+        </p:nvSpPr>
+        <p:spPr>
+          <a:xfrm>
+            <a:off x="2057400" y="4767261"/>
+            <a:ext cx="4038600" cy="1023937"/>
+          </a:xfrm>
+          <a:prstGeom prst="rect">
+            <a:avLst/>
+          </a:prstGeom>
+          <a:noFill/>
+        </p:spPr>
+        <p:txBody>
+          <a:bodyPr wrap="none" anchor="ctr">
+            <a:spAutoFit/>
+          </a:bodyPr>
+          <a:lstStyle/>
+          <a:p>
+            <a:pPr algn="l">
+              <a:lnSpc>
+                <a:spcPct val="115000"/>
+              </a:lnSpc>
+            </a:pPr>
+            <a:r>
+              <a:rPr sz="1300" b="1">
+                <a:solidFill>
+                  <a:srgbClr val="0B1D3A"/>
+                </a:solidFill>
+                <a:latin typeface="PingFang SC"/>
+              </a:rPr>
+              <a:t>约束:超时隔离</a:t>
+            </a:r>
+          </a:p>
+        </p:txBody>
+      </p:sp>
+      <p:sp>
+        <p:nvSpPr>
+          <p:cNvPr id="58" name="Rounded Rectangle 57"/>
+          <p:cNvSpPr/>
+          <p:nvPr/>
+        </p:nvSpPr>
+        <p:spPr>
+          <a:xfrm>
+            <a:off x="6362700" y="4767261"/>
+            <a:ext cx="4305300" cy="1023937"/>
+          </a:xfrm>
+          <a:prstGeom prst="roundRect">
+            <a:avLst>
+              <a:gd name="adj" fmla="val 8000"/>
+            </a:avLst>
+          </a:prstGeom>
+          <a:solidFill>
+            <a:srgbClr val="FFFFFF"/>
+          </a:solidFill>
+          <a:ln w="12700">
+            <a:solidFill>
+              <a:srgbClr val="F59E0B"/>
+            </a:solidFill>
+          </a:ln>
+          <a:effectLst/>
+        </p:spPr>
+        <p:style>
+          <a:lnRef idx="1">
+            <a:schemeClr val="accent1"/>
+          </a:lnRef>
+          <a:fillRef idx="3">
+            <a:schemeClr val="accent1"/>
+          </a:fillRef>
+          <a:effectRef idx="2">
+            <a:schemeClr val="accent1"/>
+          </a:effectRef>
+          <a:fontRef idx="minor">
+            <a:schemeClr val="lt1"/>
+          </a:fontRef>
+        </p:style>
+        <p:txBody>
+          <a:bodyPr rtlCol="0" anchor="ctr"/>
+          <a:lstStyle/>
+          <a:p>
+            <a:pPr algn="ctr"/>
+          </a:p>
+        </p:txBody>
+      </p:sp>
+      <p:sp>
+        <p:nvSpPr>
+          <p:cNvPr id="59" name="Rectangle 58"/>
+          <p:cNvSpPr/>
+          <p:nvPr/>
+        </p:nvSpPr>
+        <p:spPr>
+          <a:xfrm>
+            <a:off x="6362700" y="4767261"/>
+            <a:ext cx="47625" cy="1023937"/>
+          </a:xfrm>
+          <a:prstGeom prst="rect">
+            <a:avLst/>
+          </a:prstGeom>
+          <a:solidFill>
+            <a:srgbClr val="F59E0B"/>
+          </a:solidFill>
+          <a:ln>
+            <a:noFill/>
+          </a:ln>
+          <a:effectLst/>
+        </p:spPr>
+        <p:style>
+          <a:lnRef idx="1">
+            <a:schemeClr val="accent1"/>
+          </a:lnRef>
+          <a:fillRef idx="3">
+            <a:schemeClr val="accent1"/>
+          </a:fillRef>
+          <a:effectRef idx="2">
+            <a:schemeClr val="accent1"/>
+          </a:effectRef>
+          <a:fontRef idx="minor">
+            <a:schemeClr val="lt1"/>
+          </a:fontRef>
+        </p:style>
+        <p:txBody>
+          <a:bodyPr rtlCol="0" anchor="ctr"/>
+          <a:lstStyle/>
+          <a:p>
+            <a:pPr algn="ctr"/>
+          </a:p>
+        </p:txBody>
+      </p:sp>
+      <p:sp>
+        <p:nvSpPr>
+          <p:cNvPr id="60" name="TextBox 59"/>
+          <p:cNvSpPr txBox="1"/>
+          <p:nvPr/>
+        </p:nvSpPr>
+        <p:spPr>
+          <a:xfrm>
+            <a:off x="6515100" y="4767261"/>
+            <a:ext cx="4038600" cy="1023937"/>
+          </a:xfrm>
+          <a:prstGeom prst="rect">
+            <a:avLst/>
+          </a:prstGeom>
+          <a:noFill/>
+        </p:spPr>
+        <p:txBody>
+          <a:bodyPr wrap="none" anchor="ctr">
+            <a:spAutoFit/>
+          </a:bodyPr>
+          <a:lstStyle/>
+          <a:p>
+            <a:pPr algn="l">
+              <a:lnSpc>
+                <a:spcPct val="115000"/>
+              </a:lnSpc>
+            </a:pPr>
+            <a:r>
+              <a:rPr sz="1300" b="1">
+                <a:solidFill>
+                  <a:srgbClr val="0B1D3A"/>
+                </a:solidFill>
+                <a:latin typeface="PingFang SC"/>
+              </a:rPr>
+              <a:t>Token 预算</a:t>
+            </a:r>
+          </a:p>
+        </p:txBody>
+      </p:sp>
+      <p:sp>
+        <p:nvSpPr>
+          <p:cNvPr id="61" name="TextBox 60"/>
+          <p:cNvSpPr txBox="1"/>
+          <p:nvPr/>
+        </p:nvSpPr>
+        <p:spPr>
+          <a:xfrm>
+            <a:off x="10287000" y="6534150"/>
+            <a:ext cx="1619250" cy="266700"/>
           </a:xfrm>
           <a:prstGeom prst="rect">
             <a:avLst/>
@@ -31941,2155 +34351,6 @@
               </a:lnSpc>
             </a:pPr>
             <a:r>
-              <a:rPr sz="1100" b="0">
-                <a:solidFill>
-                  <a:srgbClr val="94A3B8"/>
-                </a:solidFill>
-                <a:latin typeface="PingFang SC"/>
-              </a:rPr>
-              <a:t>asyncio.gather 实现十万级并发原语同款</a:t>
-            </a:r>
-          </a:p>
-        </p:txBody>
-      </p:sp>
-      <p:sp>
-        <p:nvSpPr>
-          <p:cNvPr id="6" name="Rounded Rectangle 5"/>
-          <p:cNvSpPr/>
-          <p:nvPr/>
-        </p:nvSpPr>
-        <p:spPr>
-          <a:xfrm>
-            <a:off x="1847850" y="914400"/>
-            <a:ext cx="8877300" cy="1100137"/>
-          </a:xfrm>
-          <a:prstGeom prst="roundRect">
-            <a:avLst>
-              <a:gd name="adj" fmla="val 8000"/>
-            </a:avLst>
-          </a:prstGeom>
-          <a:solidFill>
-            <a:srgbClr val="F1F5F9"/>
-          </a:solidFill>
-          <a:ln>
-            <a:noFill/>
-          </a:ln>
-          <a:effectLst/>
-        </p:spPr>
-        <p:style>
-          <a:lnRef idx="1">
-            <a:schemeClr val="accent1"/>
-          </a:lnRef>
-          <a:fillRef idx="3">
-            <a:schemeClr val="accent1"/>
-          </a:fillRef>
-          <a:effectRef idx="2">
-            <a:schemeClr val="accent1"/>
-          </a:effectRef>
-          <a:fontRef idx="minor">
-            <a:schemeClr val="lt1"/>
-          </a:fontRef>
-        </p:style>
-        <p:txBody>
-          <a:bodyPr rtlCol="0" anchor="ctr"/>
-          <a:lstStyle/>
-          <a:p>
-            <a:pPr algn="ctr"/>
-          </a:p>
-        </p:txBody>
-      </p:sp>
-      <p:sp>
-        <p:nvSpPr>
-          <p:cNvPr id="7" name="Rounded Rectangle 6"/>
-          <p:cNvSpPr/>
-          <p:nvPr/>
-        </p:nvSpPr>
-        <p:spPr>
-          <a:xfrm>
-            <a:off x="1905000" y="952500"/>
-            <a:ext cx="2819400" cy="1023937"/>
-          </a:xfrm>
-          <a:prstGeom prst="roundRect">
-            <a:avLst>
-              <a:gd name="adj" fmla="val 8000"/>
-            </a:avLst>
-          </a:prstGeom>
-          <a:solidFill>
-            <a:srgbClr val="FFFFFF"/>
-          </a:solidFill>
-          <a:ln w="12700">
-            <a:solidFill>
-              <a:srgbClr val="2563EB"/>
-            </a:solidFill>
-          </a:ln>
-          <a:effectLst/>
-        </p:spPr>
-        <p:style>
-          <a:lnRef idx="1">
-            <a:schemeClr val="accent1"/>
-          </a:lnRef>
-          <a:fillRef idx="3">
-            <a:schemeClr val="accent1"/>
-          </a:fillRef>
-          <a:effectRef idx="2">
-            <a:schemeClr val="accent1"/>
-          </a:effectRef>
-          <a:fontRef idx="minor">
-            <a:schemeClr val="lt1"/>
-          </a:fontRef>
-        </p:style>
-        <p:txBody>
-          <a:bodyPr rtlCol="0" anchor="ctr"/>
-          <a:lstStyle/>
-          <a:p>
-            <a:pPr algn="ctr"/>
-          </a:p>
-        </p:txBody>
-      </p:sp>
-      <p:sp>
-        <p:nvSpPr>
-          <p:cNvPr id="8" name="Rectangle 7"/>
-          <p:cNvSpPr/>
-          <p:nvPr/>
-        </p:nvSpPr>
-        <p:spPr>
-          <a:xfrm>
-            <a:off x="1905000" y="952500"/>
-            <a:ext cx="47625" cy="1023937"/>
-          </a:xfrm>
-          <a:prstGeom prst="rect">
-            <a:avLst/>
-          </a:prstGeom>
-          <a:solidFill>
-            <a:srgbClr val="2563EB"/>
-          </a:solidFill>
-          <a:ln>
-            <a:noFill/>
-          </a:ln>
-          <a:effectLst/>
-        </p:spPr>
-        <p:style>
-          <a:lnRef idx="1">
-            <a:schemeClr val="accent1"/>
-          </a:lnRef>
-          <a:fillRef idx="3">
-            <a:schemeClr val="accent1"/>
-          </a:fillRef>
-          <a:effectRef idx="2">
-            <a:schemeClr val="accent1"/>
-          </a:effectRef>
-          <a:fontRef idx="minor">
-            <a:schemeClr val="lt1"/>
-          </a:fontRef>
-        </p:style>
-        <p:txBody>
-          <a:bodyPr rtlCol="0" anchor="ctr"/>
-          <a:lstStyle/>
-          <a:p>
-            <a:pPr algn="ctr"/>
-          </a:p>
-        </p:txBody>
-      </p:sp>
-      <p:sp>
-        <p:nvSpPr>
-          <p:cNvPr id="9" name="TextBox 8"/>
-          <p:cNvSpPr txBox="1"/>
-          <p:nvPr/>
-        </p:nvSpPr>
-        <p:spPr>
-          <a:xfrm>
-            <a:off x="2038350" y="952500"/>
-            <a:ext cx="2590800" cy="1023937"/>
-          </a:xfrm>
-          <a:prstGeom prst="rect">
-            <a:avLst/>
-          </a:prstGeom>
-          <a:noFill/>
-        </p:spPr>
-        <p:txBody>
-          <a:bodyPr wrap="square" anchor="ctr">
-            <a:spAutoFit/>
-          </a:bodyPr>
-          <a:lstStyle/>
-          <a:p>
-            <a:pPr algn="l">
-              <a:lnSpc>
-                <a:spcPct val="100000"/>
-              </a:lnSpc>
-            </a:pPr>
-            <a:r>
-              <a:rPr sz="1200" b="1">
-                <a:solidFill>
-                  <a:srgbClr val="475569"/>
-                </a:solidFill>
-                <a:latin typeface="PingFang SC"/>
-              </a:rPr>
-              <a:t>主控 Agent:任务拆解</a:t>
-            </a:r>
-          </a:p>
-        </p:txBody>
-      </p:sp>
-      <p:sp>
-        <p:nvSpPr>
-          <p:cNvPr id="10" name="Rounded Rectangle 9"/>
-          <p:cNvSpPr/>
-          <p:nvPr/>
-        </p:nvSpPr>
-        <p:spPr>
-          <a:xfrm>
-            <a:off x="4876800" y="952500"/>
-            <a:ext cx="2819400" cy="1023937"/>
-          </a:xfrm>
-          <a:prstGeom prst="roundRect">
-            <a:avLst>
-              <a:gd name="adj" fmla="val 8000"/>
-            </a:avLst>
-          </a:prstGeom>
-          <a:solidFill>
-            <a:srgbClr val="FFFFFF"/>
-          </a:solidFill>
-          <a:ln w="12700">
-            <a:solidFill>
-              <a:srgbClr val="2563EB"/>
-            </a:solidFill>
-          </a:ln>
-          <a:effectLst/>
-        </p:spPr>
-        <p:style>
-          <a:lnRef idx="1">
-            <a:schemeClr val="accent1"/>
-          </a:lnRef>
-          <a:fillRef idx="3">
-            <a:schemeClr val="accent1"/>
-          </a:fillRef>
-          <a:effectRef idx="2">
-            <a:schemeClr val="accent1"/>
-          </a:effectRef>
-          <a:fontRef idx="minor">
-            <a:schemeClr val="lt1"/>
-          </a:fontRef>
-        </p:style>
-        <p:txBody>
-          <a:bodyPr rtlCol="0" anchor="ctr"/>
-          <a:lstStyle/>
-          <a:p>
-            <a:pPr algn="ctr"/>
-          </a:p>
-        </p:txBody>
-      </p:sp>
-      <p:sp>
-        <p:nvSpPr>
-          <p:cNvPr id="11" name="Rectangle 10"/>
-          <p:cNvSpPr/>
-          <p:nvPr/>
-        </p:nvSpPr>
-        <p:spPr>
-          <a:xfrm>
-            <a:off x="4876800" y="952500"/>
-            <a:ext cx="47625" cy="1023937"/>
-          </a:xfrm>
-          <a:prstGeom prst="rect">
-            <a:avLst/>
-          </a:prstGeom>
-          <a:solidFill>
-            <a:srgbClr val="2563EB"/>
-          </a:solidFill>
-          <a:ln>
-            <a:noFill/>
-          </a:ln>
-          <a:effectLst/>
-        </p:spPr>
-        <p:style>
-          <a:lnRef idx="1">
-            <a:schemeClr val="accent1"/>
-          </a:lnRef>
-          <a:fillRef idx="3">
-            <a:schemeClr val="accent1"/>
-          </a:fillRef>
-          <a:effectRef idx="2">
-            <a:schemeClr val="accent1"/>
-          </a:effectRef>
-          <a:fontRef idx="minor">
-            <a:schemeClr val="lt1"/>
-          </a:fontRef>
-        </p:style>
-        <p:txBody>
-          <a:bodyPr rtlCol="0" anchor="ctr"/>
-          <a:lstStyle/>
-          <a:p>
-            <a:pPr algn="ctr"/>
-          </a:p>
-        </p:txBody>
-      </p:sp>
-      <p:sp>
-        <p:nvSpPr>
-          <p:cNvPr id="12" name="TextBox 11"/>
-          <p:cNvSpPr txBox="1"/>
-          <p:nvPr/>
-        </p:nvSpPr>
-        <p:spPr>
-          <a:xfrm>
-            <a:off x="5010150" y="952500"/>
-            <a:ext cx="2590800" cy="1023937"/>
-          </a:xfrm>
-          <a:prstGeom prst="rect">
-            <a:avLst/>
-          </a:prstGeom>
-          <a:noFill/>
-        </p:spPr>
-        <p:txBody>
-          <a:bodyPr wrap="square" anchor="ctr">
-            <a:spAutoFit/>
-          </a:bodyPr>
-          <a:lstStyle/>
-          <a:p>
-            <a:pPr algn="l">
-              <a:lnSpc>
-                <a:spcPct val="100000"/>
-              </a:lnSpc>
-            </a:pPr>
-            <a:r>
-              <a:rPr sz="1200" b="1">
-                <a:solidFill>
-                  <a:srgbClr val="475569"/>
-                </a:solidFill>
-                <a:latin typeface="PingFang SC"/>
-              </a:rPr>
-              <a:t>调度</a:t>
-            </a:r>
-          </a:p>
-        </p:txBody>
-      </p:sp>
-      <p:sp>
-        <p:nvSpPr>
-          <p:cNvPr id="13" name="Rounded Rectangle 12"/>
-          <p:cNvSpPr/>
-          <p:nvPr/>
-        </p:nvSpPr>
-        <p:spPr>
-          <a:xfrm>
-            <a:off x="7848600" y="952500"/>
-            <a:ext cx="2819400" cy="1023937"/>
-          </a:xfrm>
-          <a:prstGeom prst="roundRect">
-            <a:avLst>
-              <a:gd name="adj" fmla="val 8000"/>
-            </a:avLst>
-          </a:prstGeom>
-          <a:solidFill>
-            <a:srgbClr val="FFFFFF"/>
-          </a:solidFill>
-          <a:ln w="12700">
-            <a:solidFill>
-              <a:srgbClr val="2563EB"/>
-            </a:solidFill>
-          </a:ln>
-          <a:effectLst/>
-        </p:spPr>
-        <p:style>
-          <a:lnRef idx="1">
-            <a:schemeClr val="accent1"/>
-          </a:lnRef>
-          <a:fillRef idx="3">
-            <a:schemeClr val="accent1"/>
-          </a:fillRef>
-          <a:effectRef idx="2">
-            <a:schemeClr val="accent1"/>
-          </a:effectRef>
-          <a:fontRef idx="minor">
-            <a:schemeClr val="lt1"/>
-          </a:fontRef>
-        </p:style>
-        <p:txBody>
-          <a:bodyPr rtlCol="0" anchor="ctr"/>
-          <a:lstStyle/>
-          <a:p>
-            <a:pPr algn="ctr"/>
-          </a:p>
-        </p:txBody>
-      </p:sp>
-      <p:sp>
-        <p:nvSpPr>
-          <p:cNvPr id="14" name="Rectangle 13"/>
-          <p:cNvSpPr/>
-          <p:nvPr/>
-        </p:nvSpPr>
-        <p:spPr>
-          <a:xfrm>
-            <a:off x="7848600" y="952500"/>
-            <a:ext cx="47625" cy="1023937"/>
-          </a:xfrm>
-          <a:prstGeom prst="rect">
-            <a:avLst/>
-          </a:prstGeom>
-          <a:solidFill>
-            <a:srgbClr val="2563EB"/>
-          </a:solidFill>
-          <a:ln>
-            <a:noFill/>
-          </a:ln>
-          <a:effectLst/>
-        </p:spPr>
-        <p:style>
-          <a:lnRef idx="1">
-            <a:schemeClr val="accent1"/>
-          </a:lnRef>
-          <a:fillRef idx="3">
-            <a:schemeClr val="accent1"/>
-          </a:fillRef>
-          <a:effectRef idx="2">
-            <a:schemeClr val="accent1"/>
-          </a:effectRef>
-          <a:fontRef idx="minor">
-            <a:schemeClr val="lt1"/>
-          </a:fontRef>
-        </p:style>
-        <p:txBody>
-          <a:bodyPr rtlCol="0" anchor="ctr"/>
-          <a:lstStyle/>
-          <a:p>
-            <a:pPr algn="ctr"/>
-          </a:p>
-        </p:txBody>
-      </p:sp>
-      <p:sp>
-        <p:nvSpPr>
-          <p:cNvPr id="15" name="TextBox 14"/>
-          <p:cNvSpPr txBox="1"/>
-          <p:nvPr/>
-        </p:nvSpPr>
-        <p:spPr>
-          <a:xfrm>
-            <a:off x="7981950" y="952500"/>
-            <a:ext cx="2590800" cy="1023937"/>
-          </a:xfrm>
-          <a:prstGeom prst="rect">
-            <a:avLst/>
-          </a:prstGeom>
-          <a:noFill/>
-        </p:spPr>
-        <p:txBody>
-          <a:bodyPr wrap="square" anchor="ctr">
-            <a:spAutoFit/>
-          </a:bodyPr>
-          <a:lstStyle/>
-          <a:p>
-            <a:pPr algn="l">
-              <a:lnSpc>
-                <a:spcPct val="100000"/>
-              </a:lnSpc>
-            </a:pPr>
-            <a:r>
-              <a:rPr sz="1200" b="1">
-                <a:solidFill>
-                  <a:srgbClr val="475569"/>
-                </a:solidFill>
-                <a:latin typeface="PingFang SC"/>
-              </a:rPr>
-              <a:t>决策</a:t>
-            </a:r>
-          </a:p>
-        </p:txBody>
-      </p:sp>
-      <p:cxnSp>
-        <p:nvCxnSpPr>
-          <p:cNvPr id="16" name="Connector 15"/>
-          <p:cNvCxnSpPr/>
-          <p:nvPr/>
-        </p:nvCxnSpPr>
-        <p:spPr>
-          <a:xfrm>
-            <a:off x="6096000" y="2033587"/>
-            <a:ext cx="0" cy="152400"/>
-          </a:xfrm>
-          <a:prstGeom prst="line">
-            <a:avLst/>
-          </a:prstGeom>
-          <a:ln w="15240">
-            <a:solidFill>
-              <a:srgbClr val="94A3B8"/>
-            </a:solidFill>
-          </a:ln>
-        </p:spPr>
-        <p:style>
-          <a:lnRef idx="2">
-            <a:schemeClr val="accent1"/>
-          </a:lnRef>
-          <a:fillRef idx="0">
-            <a:schemeClr val="accent1"/>
-          </a:fillRef>
-          <a:effectRef idx="1">
-            <a:schemeClr val="accent1"/>
-          </a:effectRef>
-          <a:fontRef idx="minor">
-            <a:schemeClr val="tx1"/>
-          </a:fontRef>
-        </p:style>
-      </p:cxnSp>
-      <p:sp>
-        <p:nvSpPr>
-          <p:cNvPr id="17" name="Isosceles Triangle 16"/>
-          <p:cNvSpPr/>
-          <p:nvPr/>
-        </p:nvSpPr>
-        <p:spPr>
-          <a:xfrm rot="10800000">
-            <a:off x="6053138" y="2100263"/>
-            <a:ext cx="85725" cy="85725"/>
-          </a:xfrm>
-          <a:prstGeom prst="triangle">
-            <a:avLst/>
-          </a:prstGeom>
-          <a:solidFill>
-            <a:srgbClr val="94A3B8"/>
-          </a:solidFill>
-          <a:ln>
-            <a:noFill/>
-          </a:ln>
-          <a:effectLst/>
-        </p:spPr>
-        <p:style>
-          <a:lnRef idx="1">
-            <a:schemeClr val="accent1"/>
-          </a:lnRef>
-          <a:fillRef idx="3">
-            <a:schemeClr val="accent1"/>
-          </a:fillRef>
-          <a:effectRef idx="2">
-            <a:schemeClr val="accent1"/>
-          </a:effectRef>
-          <a:fontRef idx="minor">
-            <a:schemeClr val="lt1"/>
-          </a:fontRef>
-        </p:style>
-        <p:txBody>
-          <a:bodyPr rtlCol="0" anchor="ctr"/>
-          <a:lstStyle/>
-          <a:p>
-            <a:pPr algn="ctr"/>
-          </a:p>
-        </p:txBody>
-      </p:sp>
-      <p:sp>
-        <p:nvSpPr>
-          <p:cNvPr id="18" name="TextBox 17"/>
-          <p:cNvSpPr txBox="1"/>
-          <p:nvPr/>
-        </p:nvSpPr>
-        <p:spPr>
-          <a:xfrm>
-            <a:off x="6248400" y="1976437"/>
-            <a:ext cx="2095500" cy="247650"/>
-          </a:xfrm>
-          <a:prstGeom prst="rect">
-            <a:avLst/>
-          </a:prstGeom>
-          <a:noFill/>
-        </p:spPr>
-        <p:txBody>
-          <a:bodyPr wrap="square" anchor="ctr">
-            <a:spAutoFit/>
-          </a:bodyPr>
-          <a:lstStyle/>
-          <a:p>
-            <a:pPr algn="l">
-              <a:lnSpc>
-                <a:spcPct val="100000"/>
-              </a:lnSpc>
-            </a:pPr>
-            <a:r>
-              <a:rPr sz="1000" b="0">
-                <a:solidFill>
-                  <a:srgbClr val="94A3B8"/>
-                </a:solidFill>
-                <a:latin typeface="PingFang SC"/>
-              </a:rPr>
-              <a:t>拆解</a:t>
-            </a:r>
-          </a:p>
-        </p:txBody>
-      </p:sp>
-      <p:sp>
-        <p:nvSpPr>
-          <p:cNvPr id="19" name="Rounded Rectangle 18"/>
-          <p:cNvSpPr/>
-          <p:nvPr/>
-        </p:nvSpPr>
-        <p:spPr>
-          <a:xfrm>
-            <a:off x="1847850" y="2185987"/>
-            <a:ext cx="8877300" cy="1100137"/>
-          </a:xfrm>
-          <a:prstGeom prst="roundRect">
-            <a:avLst>
-              <a:gd name="adj" fmla="val 8000"/>
-            </a:avLst>
-          </a:prstGeom>
-          <a:solidFill>
-            <a:srgbClr val="F1F5F9"/>
-          </a:solidFill>
-          <a:ln>
-            <a:noFill/>
-          </a:ln>
-          <a:effectLst/>
-        </p:spPr>
-        <p:style>
-          <a:lnRef idx="1">
-            <a:schemeClr val="accent1"/>
-          </a:lnRef>
-          <a:fillRef idx="3">
-            <a:schemeClr val="accent1"/>
-          </a:fillRef>
-          <a:effectRef idx="2">
-            <a:schemeClr val="accent1"/>
-          </a:effectRef>
-          <a:fontRef idx="minor">
-            <a:schemeClr val="lt1"/>
-          </a:fontRef>
-        </p:style>
-        <p:txBody>
-          <a:bodyPr rtlCol="0" anchor="ctr"/>
-          <a:lstStyle/>
-          <a:p>
-            <a:pPr algn="ctr"/>
-          </a:p>
-        </p:txBody>
-      </p:sp>
-      <p:sp>
-        <p:nvSpPr>
-          <p:cNvPr id="20" name="Rounded Rectangle 19"/>
-          <p:cNvSpPr/>
-          <p:nvPr/>
-        </p:nvSpPr>
-        <p:spPr>
-          <a:xfrm>
-            <a:off x="1905000" y="2224087"/>
-            <a:ext cx="2076450" cy="1023937"/>
-          </a:xfrm>
-          <a:prstGeom prst="roundRect">
-            <a:avLst>
-              <a:gd name="adj" fmla="val 8000"/>
-            </a:avLst>
-          </a:prstGeom>
-          <a:solidFill>
-            <a:srgbClr val="FFFFFF"/>
-          </a:solidFill>
-          <a:ln w="12700">
-            <a:solidFill>
-              <a:srgbClr val="14B8A6"/>
-            </a:solidFill>
-          </a:ln>
-          <a:effectLst/>
-        </p:spPr>
-        <p:style>
-          <a:lnRef idx="1">
-            <a:schemeClr val="accent1"/>
-          </a:lnRef>
-          <a:fillRef idx="3">
-            <a:schemeClr val="accent1"/>
-          </a:fillRef>
-          <a:effectRef idx="2">
-            <a:schemeClr val="accent1"/>
-          </a:effectRef>
-          <a:fontRef idx="minor">
-            <a:schemeClr val="lt1"/>
-          </a:fontRef>
-        </p:style>
-        <p:txBody>
-          <a:bodyPr rtlCol="0" anchor="ctr"/>
-          <a:lstStyle/>
-          <a:p>
-            <a:pPr algn="ctr"/>
-          </a:p>
-        </p:txBody>
-      </p:sp>
-      <p:sp>
-        <p:nvSpPr>
-          <p:cNvPr id="21" name="Rectangle 20"/>
-          <p:cNvSpPr/>
-          <p:nvPr/>
-        </p:nvSpPr>
-        <p:spPr>
-          <a:xfrm>
-            <a:off x="1905000" y="2224087"/>
-            <a:ext cx="47625" cy="1023937"/>
-          </a:xfrm>
-          <a:prstGeom prst="rect">
-            <a:avLst/>
-          </a:prstGeom>
-          <a:solidFill>
-            <a:srgbClr val="14B8A6"/>
-          </a:solidFill>
-          <a:ln>
-            <a:noFill/>
-          </a:ln>
-          <a:effectLst/>
-        </p:spPr>
-        <p:style>
-          <a:lnRef idx="1">
-            <a:schemeClr val="accent1"/>
-          </a:lnRef>
-          <a:fillRef idx="3">
-            <a:schemeClr val="accent1"/>
-          </a:fillRef>
-          <a:effectRef idx="2">
-            <a:schemeClr val="accent1"/>
-          </a:effectRef>
-          <a:fontRef idx="minor">
-            <a:schemeClr val="lt1"/>
-          </a:fontRef>
-        </p:style>
-        <p:txBody>
-          <a:bodyPr rtlCol="0" anchor="ctr"/>
-          <a:lstStyle/>
-          <a:p>
-            <a:pPr algn="ctr"/>
-          </a:p>
-        </p:txBody>
-      </p:sp>
-      <p:sp>
-        <p:nvSpPr>
-          <p:cNvPr id="22" name="TextBox 21"/>
-          <p:cNvSpPr txBox="1"/>
-          <p:nvPr/>
-        </p:nvSpPr>
-        <p:spPr>
-          <a:xfrm>
-            <a:off x="2038350" y="2224087"/>
-            <a:ext cx="1847850" cy="1023937"/>
-          </a:xfrm>
-          <a:prstGeom prst="rect">
-            <a:avLst/>
-          </a:prstGeom>
-          <a:noFill/>
-        </p:spPr>
-        <p:txBody>
-          <a:bodyPr wrap="square" anchor="ctr">
-            <a:spAutoFit/>
-          </a:bodyPr>
-          <a:lstStyle/>
-          <a:p>
-            <a:pPr algn="l">
-              <a:lnSpc>
-                <a:spcPct val="100000"/>
-              </a:lnSpc>
-            </a:pPr>
-            <a:r>
-              <a:rPr sz="1200" b="1">
-                <a:solidFill>
-                  <a:srgbClr val="475569"/>
-                </a:solidFill>
-                <a:latin typeface="PingFang SC"/>
-              </a:rPr>
-              <a:t>并行 Worker:Architecture</a:t>
-            </a:r>
-          </a:p>
-        </p:txBody>
-      </p:sp>
-      <p:sp>
-        <p:nvSpPr>
-          <p:cNvPr id="23" name="Rounded Rectangle 22"/>
-          <p:cNvSpPr/>
-          <p:nvPr/>
-        </p:nvSpPr>
-        <p:spPr>
-          <a:xfrm>
-            <a:off x="4133850" y="2224087"/>
-            <a:ext cx="2076450" cy="1023937"/>
-          </a:xfrm>
-          <a:prstGeom prst="roundRect">
-            <a:avLst>
-              <a:gd name="adj" fmla="val 8000"/>
-            </a:avLst>
-          </a:prstGeom>
-          <a:solidFill>
-            <a:srgbClr val="FFFFFF"/>
-          </a:solidFill>
-          <a:ln w="12700">
-            <a:solidFill>
-              <a:srgbClr val="14B8A6"/>
-            </a:solidFill>
-          </a:ln>
-          <a:effectLst/>
-        </p:spPr>
-        <p:style>
-          <a:lnRef idx="1">
-            <a:schemeClr val="accent1"/>
-          </a:lnRef>
-          <a:fillRef idx="3">
-            <a:schemeClr val="accent1"/>
-          </a:fillRef>
-          <a:effectRef idx="2">
-            <a:schemeClr val="accent1"/>
-          </a:effectRef>
-          <a:fontRef idx="minor">
-            <a:schemeClr val="lt1"/>
-          </a:fontRef>
-        </p:style>
-        <p:txBody>
-          <a:bodyPr rtlCol="0" anchor="ctr"/>
-          <a:lstStyle/>
-          <a:p>
-            <a:pPr algn="ctr"/>
-          </a:p>
-        </p:txBody>
-      </p:sp>
-      <p:sp>
-        <p:nvSpPr>
-          <p:cNvPr id="24" name="Rectangle 23"/>
-          <p:cNvSpPr/>
-          <p:nvPr/>
-        </p:nvSpPr>
-        <p:spPr>
-          <a:xfrm>
-            <a:off x="4133850" y="2224087"/>
-            <a:ext cx="47625" cy="1023937"/>
-          </a:xfrm>
-          <a:prstGeom prst="rect">
-            <a:avLst/>
-          </a:prstGeom>
-          <a:solidFill>
-            <a:srgbClr val="14B8A6"/>
-          </a:solidFill>
-          <a:ln>
-            <a:noFill/>
-          </a:ln>
-          <a:effectLst/>
-        </p:spPr>
-        <p:style>
-          <a:lnRef idx="1">
-            <a:schemeClr val="accent1"/>
-          </a:lnRef>
-          <a:fillRef idx="3">
-            <a:schemeClr val="accent1"/>
-          </a:fillRef>
-          <a:effectRef idx="2">
-            <a:schemeClr val="accent1"/>
-          </a:effectRef>
-          <a:fontRef idx="minor">
-            <a:schemeClr val="lt1"/>
-          </a:fontRef>
-        </p:style>
-        <p:txBody>
-          <a:bodyPr rtlCol="0" anchor="ctr"/>
-          <a:lstStyle/>
-          <a:p>
-            <a:pPr algn="ctr"/>
-          </a:p>
-        </p:txBody>
-      </p:sp>
-      <p:sp>
-        <p:nvSpPr>
-          <p:cNvPr id="25" name="TextBox 24"/>
-          <p:cNvSpPr txBox="1"/>
-          <p:nvPr/>
-        </p:nvSpPr>
-        <p:spPr>
-          <a:xfrm>
-            <a:off x="4267200" y="2224087"/>
-            <a:ext cx="1847850" cy="1023937"/>
-          </a:xfrm>
-          <a:prstGeom prst="rect">
-            <a:avLst/>
-          </a:prstGeom>
-          <a:noFill/>
-        </p:spPr>
-        <p:txBody>
-          <a:bodyPr wrap="square" anchor="ctr">
-            <a:spAutoFit/>
-          </a:bodyPr>
-          <a:lstStyle/>
-          <a:p>
-            <a:pPr algn="l">
-              <a:lnSpc>
-                <a:spcPct val="100000"/>
-              </a:lnSpc>
-            </a:pPr>
-            <a:r>
-              <a:rPr sz="1200" b="1">
-                <a:solidFill>
-                  <a:srgbClr val="475569"/>
-                </a:solidFill>
-                <a:latin typeface="PingFang SC"/>
-              </a:rPr>
-              <a:t>Test</a:t>
-            </a:r>
-          </a:p>
-        </p:txBody>
-      </p:sp>
-      <p:sp>
-        <p:nvSpPr>
-          <p:cNvPr id="26" name="Rounded Rectangle 25"/>
-          <p:cNvSpPr/>
-          <p:nvPr/>
-        </p:nvSpPr>
-        <p:spPr>
-          <a:xfrm>
-            <a:off x="6362700" y="2224087"/>
-            <a:ext cx="2076450" cy="1023937"/>
-          </a:xfrm>
-          <a:prstGeom prst="roundRect">
-            <a:avLst>
-              <a:gd name="adj" fmla="val 8000"/>
-            </a:avLst>
-          </a:prstGeom>
-          <a:solidFill>
-            <a:srgbClr val="FFFFFF"/>
-          </a:solidFill>
-          <a:ln w="12700">
-            <a:solidFill>
-              <a:srgbClr val="14B8A6"/>
-            </a:solidFill>
-          </a:ln>
-          <a:effectLst/>
-        </p:spPr>
-        <p:style>
-          <a:lnRef idx="1">
-            <a:schemeClr val="accent1"/>
-          </a:lnRef>
-          <a:fillRef idx="3">
-            <a:schemeClr val="accent1"/>
-          </a:fillRef>
-          <a:effectRef idx="2">
-            <a:schemeClr val="accent1"/>
-          </a:effectRef>
-          <a:fontRef idx="minor">
-            <a:schemeClr val="lt1"/>
-          </a:fontRef>
-        </p:style>
-        <p:txBody>
-          <a:bodyPr rtlCol="0" anchor="ctr"/>
-          <a:lstStyle/>
-          <a:p>
-            <a:pPr algn="ctr"/>
-          </a:p>
-        </p:txBody>
-      </p:sp>
-      <p:sp>
-        <p:nvSpPr>
-          <p:cNvPr id="27" name="Rectangle 26"/>
-          <p:cNvSpPr/>
-          <p:nvPr/>
-        </p:nvSpPr>
-        <p:spPr>
-          <a:xfrm>
-            <a:off x="6362700" y="2224087"/>
-            <a:ext cx="47625" cy="1023937"/>
-          </a:xfrm>
-          <a:prstGeom prst="rect">
-            <a:avLst/>
-          </a:prstGeom>
-          <a:solidFill>
-            <a:srgbClr val="14B8A6"/>
-          </a:solidFill>
-          <a:ln>
-            <a:noFill/>
-          </a:ln>
-          <a:effectLst/>
-        </p:spPr>
-        <p:style>
-          <a:lnRef idx="1">
-            <a:schemeClr val="accent1"/>
-          </a:lnRef>
-          <a:fillRef idx="3">
-            <a:schemeClr val="accent1"/>
-          </a:fillRef>
-          <a:effectRef idx="2">
-            <a:schemeClr val="accent1"/>
-          </a:effectRef>
-          <a:fontRef idx="minor">
-            <a:schemeClr val="lt1"/>
-          </a:fontRef>
-        </p:style>
-        <p:txBody>
-          <a:bodyPr rtlCol="0" anchor="ctr"/>
-          <a:lstStyle/>
-          <a:p>
-            <a:pPr algn="ctr"/>
-          </a:p>
-        </p:txBody>
-      </p:sp>
-      <p:sp>
-        <p:nvSpPr>
-          <p:cNvPr id="28" name="TextBox 27"/>
-          <p:cNvSpPr txBox="1"/>
-          <p:nvPr/>
-        </p:nvSpPr>
-        <p:spPr>
-          <a:xfrm>
-            <a:off x="6496050" y="2224087"/>
-            <a:ext cx="1847850" cy="1023937"/>
-          </a:xfrm>
-          <a:prstGeom prst="rect">
-            <a:avLst/>
-          </a:prstGeom>
-          <a:noFill/>
-        </p:spPr>
-        <p:txBody>
-          <a:bodyPr wrap="square" anchor="ctr">
-            <a:spAutoFit/>
-          </a:bodyPr>
-          <a:lstStyle/>
-          <a:p>
-            <a:pPr algn="l">
-              <a:lnSpc>
-                <a:spcPct val="100000"/>
-              </a:lnSpc>
-            </a:pPr>
-            <a:r>
-              <a:rPr sz="1200" b="1">
-                <a:solidFill>
-                  <a:srgbClr val="475569"/>
-                </a:solidFill>
-                <a:latin typeface="PingFang SC"/>
-              </a:rPr>
-              <a:t>Security</a:t>
-            </a:r>
-          </a:p>
-        </p:txBody>
-      </p:sp>
-      <p:sp>
-        <p:nvSpPr>
-          <p:cNvPr id="29" name="Rounded Rectangle 28"/>
-          <p:cNvSpPr/>
-          <p:nvPr/>
-        </p:nvSpPr>
-        <p:spPr>
-          <a:xfrm>
-            <a:off x="8591550" y="2224087"/>
-            <a:ext cx="2076450" cy="1023937"/>
-          </a:xfrm>
-          <a:prstGeom prst="roundRect">
-            <a:avLst>
-              <a:gd name="adj" fmla="val 8000"/>
-            </a:avLst>
-          </a:prstGeom>
-          <a:solidFill>
-            <a:srgbClr val="FFFFFF"/>
-          </a:solidFill>
-          <a:ln w="12700">
-            <a:solidFill>
-              <a:srgbClr val="14B8A6"/>
-            </a:solidFill>
-          </a:ln>
-          <a:effectLst/>
-        </p:spPr>
-        <p:style>
-          <a:lnRef idx="1">
-            <a:schemeClr val="accent1"/>
-          </a:lnRef>
-          <a:fillRef idx="3">
-            <a:schemeClr val="accent1"/>
-          </a:fillRef>
-          <a:effectRef idx="2">
-            <a:schemeClr val="accent1"/>
-          </a:effectRef>
-          <a:fontRef idx="minor">
-            <a:schemeClr val="lt1"/>
-          </a:fontRef>
-        </p:style>
-        <p:txBody>
-          <a:bodyPr rtlCol="0" anchor="ctr"/>
-          <a:lstStyle/>
-          <a:p>
-            <a:pPr algn="ctr"/>
-          </a:p>
-        </p:txBody>
-      </p:sp>
-      <p:sp>
-        <p:nvSpPr>
-          <p:cNvPr id="30" name="Rectangle 29"/>
-          <p:cNvSpPr/>
-          <p:nvPr/>
-        </p:nvSpPr>
-        <p:spPr>
-          <a:xfrm>
-            <a:off x="8591550" y="2224087"/>
-            <a:ext cx="47625" cy="1023937"/>
-          </a:xfrm>
-          <a:prstGeom prst="rect">
-            <a:avLst/>
-          </a:prstGeom>
-          <a:solidFill>
-            <a:srgbClr val="14B8A6"/>
-          </a:solidFill>
-          <a:ln>
-            <a:noFill/>
-          </a:ln>
-          <a:effectLst/>
-        </p:spPr>
-        <p:style>
-          <a:lnRef idx="1">
-            <a:schemeClr val="accent1"/>
-          </a:lnRef>
-          <a:fillRef idx="3">
-            <a:schemeClr val="accent1"/>
-          </a:fillRef>
-          <a:effectRef idx="2">
-            <a:schemeClr val="accent1"/>
-          </a:effectRef>
-          <a:fontRef idx="minor">
-            <a:schemeClr val="lt1"/>
-          </a:fontRef>
-        </p:style>
-        <p:txBody>
-          <a:bodyPr rtlCol="0" anchor="ctr"/>
-          <a:lstStyle/>
-          <a:p>
-            <a:pPr algn="ctr"/>
-          </a:p>
-        </p:txBody>
-      </p:sp>
-      <p:sp>
-        <p:nvSpPr>
-          <p:cNvPr id="31" name="TextBox 30"/>
-          <p:cNvSpPr txBox="1"/>
-          <p:nvPr/>
-        </p:nvSpPr>
-        <p:spPr>
-          <a:xfrm>
-            <a:off x="8724900" y="2224087"/>
-            <a:ext cx="1847850" cy="1023937"/>
-          </a:xfrm>
-          <a:prstGeom prst="rect">
-            <a:avLst/>
-          </a:prstGeom>
-          <a:noFill/>
-        </p:spPr>
-        <p:txBody>
-          <a:bodyPr wrap="square" anchor="ctr">
-            <a:spAutoFit/>
-          </a:bodyPr>
-          <a:lstStyle/>
-          <a:p>
-            <a:pPr algn="l">
-              <a:lnSpc>
-                <a:spcPct val="100000"/>
-              </a:lnSpc>
-            </a:pPr>
-            <a:r>
-              <a:rPr sz="1200" b="1">
-                <a:solidFill>
-                  <a:srgbClr val="475569"/>
-                </a:solidFill>
-                <a:latin typeface="PingFang SC"/>
-              </a:rPr>
-              <a:t>Performance</a:t>
-            </a:r>
-          </a:p>
-        </p:txBody>
-      </p:sp>
-      <p:cxnSp>
-        <p:nvCxnSpPr>
-          <p:cNvPr id="32" name="Connector 31"/>
-          <p:cNvCxnSpPr/>
-          <p:nvPr/>
-        </p:nvCxnSpPr>
-        <p:spPr>
-          <a:xfrm>
-            <a:off x="6096000" y="3305174"/>
-            <a:ext cx="0" cy="152400"/>
-          </a:xfrm>
-          <a:prstGeom prst="line">
-            <a:avLst/>
-          </a:prstGeom>
-          <a:ln w="15240">
-            <a:solidFill>
-              <a:srgbClr val="94A3B8"/>
-            </a:solidFill>
-          </a:ln>
-        </p:spPr>
-        <p:style>
-          <a:lnRef idx="2">
-            <a:schemeClr val="accent1"/>
-          </a:lnRef>
-          <a:fillRef idx="0">
-            <a:schemeClr val="accent1"/>
-          </a:fillRef>
-          <a:effectRef idx="1">
-            <a:schemeClr val="accent1"/>
-          </a:effectRef>
-          <a:fontRef idx="minor">
-            <a:schemeClr val="tx1"/>
-          </a:fontRef>
-        </p:style>
-      </p:cxnSp>
-      <p:sp>
-        <p:nvSpPr>
-          <p:cNvPr id="33" name="Isosceles Triangle 32"/>
-          <p:cNvSpPr/>
-          <p:nvPr/>
-        </p:nvSpPr>
-        <p:spPr>
-          <a:xfrm rot="10800000">
-            <a:off x="6053138" y="3371850"/>
-            <a:ext cx="85725" cy="85725"/>
-          </a:xfrm>
-          <a:prstGeom prst="triangle">
-            <a:avLst/>
-          </a:prstGeom>
-          <a:solidFill>
-            <a:srgbClr val="94A3B8"/>
-          </a:solidFill>
-          <a:ln>
-            <a:noFill/>
-          </a:ln>
-          <a:effectLst/>
-        </p:spPr>
-        <p:style>
-          <a:lnRef idx="1">
-            <a:schemeClr val="accent1"/>
-          </a:lnRef>
-          <a:fillRef idx="3">
-            <a:schemeClr val="accent1"/>
-          </a:fillRef>
-          <a:effectRef idx="2">
-            <a:schemeClr val="accent1"/>
-          </a:effectRef>
-          <a:fontRef idx="minor">
-            <a:schemeClr val="lt1"/>
-          </a:fontRef>
-        </p:style>
-        <p:txBody>
-          <a:bodyPr rtlCol="0" anchor="ctr"/>
-          <a:lstStyle/>
-          <a:p>
-            <a:pPr algn="ctr"/>
-          </a:p>
-        </p:txBody>
-      </p:sp>
-      <p:sp>
-        <p:nvSpPr>
-          <p:cNvPr id="34" name="TextBox 33"/>
-          <p:cNvSpPr txBox="1"/>
-          <p:nvPr/>
-        </p:nvSpPr>
-        <p:spPr>
-          <a:xfrm>
-            <a:off x="6248400" y="3248024"/>
-            <a:ext cx="2095500" cy="247650"/>
-          </a:xfrm>
-          <a:prstGeom prst="rect">
-            <a:avLst/>
-          </a:prstGeom>
-          <a:noFill/>
-        </p:spPr>
-        <p:txBody>
-          <a:bodyPr wrap="square" anchor="ctr">
-            <a:spAutoFit/>
-          </a:bodyPr>
-          <a:lstStyle/>
-          <a:p>
-            <a:pPr algn="l">
-              <a:lnSpc>
-                <a:spcPct val="100000"/>
-              </a:lnSpc>
-            </a:pPr>
-            <a:r>
-              <a:rPr sz="1000" b="0">
-                <a:solidFill>
-                  <a:srgbClr val="94A3B8"/>
-                </a:solidFill>
-                <a:latin typeface="PingFang SC"/>
-              </a:rPr>
-              <a:t>并行执行</a:t>
-            </a:r>
-          </a:p>
-        </p:txBody>
-      </p:sp>
-      <p:sp>
-        <p:nvSpPr>
-          <p:cNvPr id="35" name="Rounded Rectangle 34"/>
-          <p:cNvSpPr/>
-          <p:nvPr/>
-        </p:nvSpPr>
-        <p:spPr>
-          <a:xfrm>
-            <a:off x="1847850" y="3457574"/>
-            <a:ext cx="8877300" cy="1100137"/>
-          </a:xfrm>
-          <a:prstGeom prst="roundRect">
-            <a:avLst>
-              <a:gd name="adj" fmla="val 8000"/>
-            </a:avLst>
-          </a:prstGeom>
-          <a:solidFill>
-            <a:srgbClr val="F1F5F9"/>
-          </a:solidFill>
-          <a:ln>
-            <a:noFill/>
-          </a:ln>
-          <a:effectLst/>
-        </p:spPr>
-        <p:style>
-          <a:lnRef idx="1">
-            <a:schemeClr val="accent1"/>
-          </a:lnRef>
-          <a:fillRef idx="3">
-            <a:schemeClr val="accent1"/>
-          </a:fillRef>
-          <a:effectRef idx="2">
-            <a:schemeClr val="accent1"/>
-          </a:effectRef>
-          <a:fontRef idx="minor">
-            <a:schemeClr val="lt1"/>
-          </a:fontRef>
-        </p:style>
-        <p:txBody>
-          <a:bodyPr rtlCol="0" anchor="ctr"/>
-          <a:lstStyle/>
-          <a:p>
-            <a:pPr algn="ctr"/>
-          </a:p>
-        </p:txBody>
-      </p:sp>
-      <p:sp>
-        <p:nvSpPr>
-          <p:cNvPr id="36" name="Rounded Rectangle 35"/>
-          <p:cNvSpPr/>
-          <p:nvPr/>
-        </p:nvSpPr>
-        <p:spPr>
-          <a:xfrm>
-            <a:off x="1905000" y="3495674"/>
-            <a:ext cx="2819400" cy="1023937"/>
-          </a:xfrm>
-          <a:prstGeom prst="roundRect">
-            <a:avLst>
-              <a:gd name="adj" fmla="val 8000"/>
-            </a:avLst>
-          </a:prstGeom>
-          <a:solidFill>
-            <a:srgbClr val="FFFFFF"/>
-          </a:solidFill>
-          <a:ln w="12700">
-            <a:solidFill>
-              <a:srgbClr val="8B5CF6"/>
-            </a:solidFill>
-          </a:ln>
-          <a:effectLst/>
-        </p:spPr>
-        <p:style>
-          <a:lnRef idx="1">
-            <a:schemeClr val="accent1"/>
-          </a:lnRef>
-          <a:fillRef idx="3">
-            <a:schemeClr val="accent1"/>
-          </a:fillRef>
-          <a:effectRef idx="2">
-            <a:schemeClr val="accent1"/>
-          </a:effectRef>
-          <a:fontRef idx="minor">
-            <a:schemeClr val="lt1"/>
-          </a:fontRef>
-        </p:style>
-        <p:txBody>
-          <a:bodyPr rtlCol="0" anchor="ctr"/>
-          <a:lstStyle/>
-          <a:p>
-            <a:pPr algn="ctr"/>
-          </a:p>
-        </p:txBody>
-      </p:sp>
-      <p:sp>
-        <p:nvSpPr>
-          <p:cNvPr id="37" name="Rectangle 36"/>
-          <p:cNvSpPr/>
-          <p:nvPr/>
-        </p:nvSpPr>
-        <p:spPr>
-          <a:xfrm>
-            <a:off x="1905000" y="3495674"/>
-            <a:ext cx="47625" cy="1023937"/>
-          </a:xfrm>
-          <a:prstGeom prst="rect">
-            <a:avLst/>
-          </a:prstGeom>
-          <a:solidFill>
-            <a:srgbClr val="8B5CF6"/>
-          </a:solidFill>
-          <a:ln>
-            <a:noFill/>
-          </a:ln>
-          <a:effectLst/>
-        </p:spPr>
-        <p:style>
-          <a:lnRef idx="1">
-            <a:schemeClr val="accent1"/>
-          </a:lnRef>
-          <a:fillRef idx="3">
-            <a:schemeClr val="accent1"/>
-          </a:fillRef>
-          <a:effectRef idx="2">
-            <a:schemeClr val="accent1"/>
-          </a:effectRef>
-          <a:fontRef idx="minor">
-            <a:schemeClr val="lt1"/>
-          </a:fontRef>
-        </p:style>
-        <p:txBody>
-          <a:bodyPr rtlCol="0" anchor="ctr"/>
-          <a:lstStyle/>
-          <a:p>
-            <a:pPr algn="ctr"/>
-          </a:p>
-        </p:txBody>
-      </p:sp>
-      <p:sp>
-        <p:nvSpPr>
-          <p:cNvPr id="38" name="TextBox 37"/>
-          <p:cNvSpPr txBox="1"/>
-          <p:nvPr/>
-        </p:nvSpPr>
-        <p:spPr>
-          <a:xfrm>
-            <a:off x="2038350" y="3495674"/>
-            <a:ext cx="2590800" cy="1023937"/>
-          </a:xfrm>
-          <a:prstGeom prst="rect">
-            <a:avLst/>
-          </a:prstGeom>
-          <a:noFill/>
-        </p:spPr>
-        <p:txBody>
-          <a:bodyPr wrap="square" anchor="ctr">
-            <a:spAutoFit/>
-          </a:bodyPr>
-          <a:lstStyle/>
-          <a:p>
-            <a:pPr algn="l">
-              <a:lnSpc>
-                <a:spcPct val="100000"/>
-              </a:lnSpc>
-            </a:pPr>
-            <a:r>
-              <a:rPr sz="1200" b="1">
-                <a:solidFill>
-                  <a:srgbClr val="475569"/>
-                </a:solidFill>
-                <a:latin typeface="PingFang SC"/>
-              </a:rPr>
-              <a:t>支撑:结果聚合</a:t>
-            </a:r>
-          </a:p>
-        </p:txBody>
-      </p:sp>
-      <p:sp>
-        <p:nvSpPr>
-          <p:cNvPr id="39" name="Rounded Rectangle 38"/>
-          <p:cNvSpPr/>
-          <p:nvPr/>
-        </p:nvSpPr>
-        <p:spPr>
-          <a:xfrm>
-            <a:off x="4876800" y="3495674"/>
-            <a:ext cx="2819400" cy="1023937"/>
-          </a:xfrm>
-          <a:prstGeom prst="roundRect">
-            <a:avLst>
-              <a:gd name="adj" fmla="val 8000"/>
-            </a:avLst>
-          </a:prstGeom>
-          <a:solidFill>
-            <a:srgbClr val="FFFFFF"/>
-          </a:solidFill>
-          <a:ln w="12700">
-            <a:solidFill>
-              <a:srgbClr val="8B5CF6"/>
-            </a:solidFill>
-          </a:ln>
-          <a:effectLst/>
-        </p:spPr>
-        <p:style>
-          <a:lnRef idx="1">
-            <a:schemeClr val="accent1"/>
-          </a:lnRef>
-          <a:fillRef idx="3">
-            <a:schemeClr val="accent1"/>
-          </a:fillRef>
-          <a:effectRef idx="2">
-            <a:schemeClr val="accent1"/>
-          </a:effectRef>
-          <a:fontRef idx="minor">
-            <a:schemeClr val="lt1"/>
-          </a:fontRef>
-        </p:style>
-        <p:txBody>
-          <a:bodyPr rtlCol="0" anchor="ctr"/>
-          <a:lstStyle/>
-          <a:p>
-            <a:pPr algn="ctr"/>
-          </a:p>
-        </p:txBody>
-      </p:sp>
-      <p:sp>
-        <p:nvSpPr>
-          <p:cNvPr id="40" name="Rectangle 39"/>
-          <p:cNvSpPr/>
-          <p:nvPr/>
-        </p:nvSpPr>
-        <p:spPr>
-          <a:xfrm>
-            <a:off x="4876800" y="3495674"/>
-            <a:ext cx="47625" cy="1023937"/>
-          </a:xfrm>
-          <a:prstGeom prst="rect">
-            <a:avLst/>
-          </a:prstGeom>
-          <a:solidFill>
-            <a:srgbClr val="8B5CF6"/>
-          </a:solidFill>
-          <a:ln>
-            <a:noFill/>
-          </a:ln>
-          <a:effectLst/>
-        </p:spPr>
-        <p:style>
-          <a:lnRef idx="1">
-            <a:schemeClr val="accent1"/>
-          </a:lnRef>
-          <a:fillRef idx="3">
-            <a:schemeClr val="accent1"/>
-          </a:fillRef>
-          <a:effectRef idx="2">
-            <a:schemeClr val="accent1"/>
-          </a:effectRef>
-          <a:fontRef idx="minor">
-            <a:schemeClr val="lt1"/>
-          </a:fontRef>
-        </p:style>
-        <p:txBody>
-          <a:bodyPr rtlCol="0" anchor="ctr"/>
-          <a:lstStyle/>
-          <a:p>
-            <a:pPr algn="ctr"/>
-          </a:p>
-        </p:txBody>
-      </p:sp>
-      <p:sp>
-        <p:nvSpPr>
-          <p:cNvPr id="41" name="TextBox 40"/>
-          <p:cNvSpPr txBox="1"/>
-          <p:nvPr/>
-        </p:nvSpPr>
-        <p:spPr>
-          <a:xfrm>
-            <a:off x="5010150" y="3495674"/>
-            <a:ext cx="2590800" cy="1023937"/>
-          </a:xfrm>
-          <a:prstGeom prst="rect">
-            <a:avLst/>
-          </a:prstGeom>
-          <a:noFill/>
-        </p:spPr>
-        <p:txBody>
-          <a:bodyPr wrap="square" anchor="ctr">
-            <a:spAutoFit/>
-          </a:bodyPr>
-          <a:lstStyle/>
-          <a:p>
-            <a:pPr algn="l">
-              <a:lnSpc>
-                <a:spcPct val="100000"/>
-              </a:lnSpc>
-            </a:pPr>
-            <a:r>
-              <a:rPr sz="1200" b="1">
-                <a:solidFill>
-                  <a:srgbClr val="475569"/>
-                </a:solidFill>
-                <a:latin typeface="PingFang SC"/>
-              </a:rPr>
-              <a:t>冲突仲裁</a:t>
-            </a:r>
-          </a:p>
-        </p:txBody>
-      </p:sp>
-      <p:sp>
-        <p:nvSpPr>
-          <p:cNvPr id="42" name="Rounded Rectangle 41"/>
-          <p:cNvSpPr/>
-          <p:nvPr/>
-        </p:nvSpPr>
-        <p:spPr>
-          <a:xfrm>
-            <a:off x="7848600" y="3495674"/>
-            <a:ext cx="2819400" cy="1023937"/>
-          </a:xfrm>
-          <a:prstGeom prst="roundRect">
-            <a:avLst>
-              <a:gd name="adj" fmla="val 8000"/>
-            </a:avLst>
-          </a:prstGeom>
-          <a:solidFill>
-            <a:srgbClr val="FFFFFF"/>
-          </a:solidFill>
-          <a:ln w="12700">
-            <a:solidFill>
-              <a:srgbClr val="8B5CF6"/>
-            </a:solidFill>
-          </a:ln>
-          <a:effectLst/>
-        </p:spPr>
-        <p:style>
-          <a:lnRef idx="1">
-            <a:schemeClr val="accent1"/>
-          </a:lnRef>
-          <a:fillRef idx="3">
-            <a:schemeClr val="accent1"/>
-          </a:fillRef>
-          <a:effectRef idx="2">
-            <a:schemeClr val="accent1"/>
-          </a:effectRef>
-          <a:fontRef idx="minor">
-            <a:schemeClr val="lt1"/>
-          </a:fontRef>
-        </p:style>
-        <p:txBody>
-          <a:bodyPr rtlCol="0" anchor="ctr"/>
-          <a:lstStyle/>
-          <a:p>
-            <a:pPr algn="ctr"/>
-          </a:p>
-        </p:txBody>
-      </p:sp>
-      <p:sp>
-        <p:nvSpPr>
-          <p:cNvPr id="43" name="Rectangle 42"/>
-          <p:cNvSpPr/>
-          <p:nvPr/>
-        </p:nvSpPr>
-        <p:spPr>
-          <a:xfrm>
-            <a:off x="7848600" y="3495674"/>
-            <a:ext cx="47625" cy="1023937"/>
-          </a:xfrm>
-          <a:prstGeom prst="rect">
-            <a:avLst/>
-          </a:prstGeom>
-          <a:solidFill>
-            <a:srgbClr val="8B5CF6"/>
-          </a:solidFill>
-          <a:ln>
-            <a:noFill/>
-          </a:ln>
-          <a:effectLst/>
-        </p:spPr>
-        <p:style>
-          <a:lnRef idx="1">
-            <a:schemeClr val="accent1"/>
-          </a:lnRef>
-          <a:fillRef idx="3">
-            <a:schemeClr val="accent1"/>
-          </a:fillRef>
-          <a:effectRef idx="2">
-            <a:schemeClr val="accent1"/>
-          </a:effectRef>
-          <a:fontRef idx="minor">
-            <a:schemeClr val="lt1"/>
-          </a:fontRef>
-        </p:style>
-        <p:txBody>
-          <a:bodyPr rtlCol="0" anchor="ctr"/>
-          <a:lstStyle/>
-          <a:p>
-            <a:pPr algn="ctr"/>
-          </a:p>
-        </p:txBody>
-      </p:sp>
-      <p:sp>
-        <p:nvSpPr>
-          <p:cNvPr id="44" name="TextBox 43"/>
-          <p:cNvSpPr txBox="1"/>
-          <p:nvPr/>
-        </p:nvSpPr>
-        <p:spPr>
-          <a:xfrm>
-            <a:off x="7981950" y="3495674"/>
-            <a:ext cx="2590800" cy="1023937"/>
-          </a:xfrm>
-          <a:prstGeom prst="rect">
-            <a:avLst/>
-          </a:prstGeom>
-          <a:noFill/>
-        </p:spPr>
-        <p:txBody>
-          <a:bodyPr wrap="square" anchor="ctr">
-            <a:spAutoFit/>
-          </a:bodyPr>
-          <a:lstStyle/>
-          <a:p>
-            <a:pPr algn="l">
-              <a:lnSpc>
-                <a:spcPct val="100000"/>
-              </a:lnSpc>
-            </a:pPr>
-            <a:r>
-              <a:rPr sz="1200" b="1">
-                <a:solidFill>
-                  <a:srgbClr val="475569"/>
-                </a:solidFill>
-                <a:latin typeface="PingFang SC"/>
-              </a:rPr>
-              <a:t>证据保留</a:t>
-            </a:r>
-          </a:p>
-        </p:txBody>
-      </p:sp>
-      <p:cxnSp>
-        <p:nvCxnSpPr>
-          <p:cNvPr id="45" name="Connector 44"/>
-          <p:cNvCxnSpPr/>
-          <p:nvPr/>
-        </p:nvCxnSpPr>
-        <p:spPr>
-          <a:xfrm>
-            <a:off x="6096000" y="4576761"/>
-            <a:ext cx="0" cy="152400"/>
-          </a:xfrm>
-          <a:prstGeom prst="line">
-            <a:avLst/>
-          </a:prstGeom>
-          <a:ln w="15240">
-            <a:solidFill>
-              <a:srgbClr val="94A3B8"/>
-            </a:solidFill>
-          </a:ln>
-        </p:spPr>
-        <p:style>
-          <a:lnRef idx="2">
-            <a:schemeClr val="accent1"/>
-          </a:lnRef>
-          <a:fillRef idx="0">
-            <a:schemeClr val="accent1"/>
-          </a:fillRef>
-          <a:effectRef idx="1">
-            <a:schemeClr val="accent1"/>
-          </a:effectRef>
-          <a:fontRef idx="minor">
-            <a:schemeClr val="tx1"/>
-          </a:fontRef>
-        </p:style>
-      </p:cxnSp>
-      <p:sp>
-        <p:nvSpPr>
-          <p:cNvPr id="46" name="Isosceles Triangle 45"/>
-          <p:cNvSpPr/>
-          <p:nvPr/>
-        </p:nvSpPr>
-        <p:spPr>
-          <a:xfrm rot="10800000">
-            <a:off x="6053138" y="4643437"/>
-            <a:ext cx="85725" cy="85725"/>
-          </a:xfrm>
-          <a:prstGeom prst="triangle">
-            <a:avLst/>
-          </a:prstGeom>
-          <a:solidFill>
-            <a:srgbClr val="94A3B8"/>
-          </a:solidFill>
-          <a:ln>
-            <a:noFill/>
-          </a:ln>
-          <a:effectLst/>
-        </p:spPr>
-        <p:style>
-          <a:lnRef idx="1">
-            <a:schemeClr val="accent1"/>
-          </a:lnRef>
-          <a:fillRef idx="3">
-            <a:schemeClr val="accent1"/>
-          </a:fillRef>
-          <a:effectRef idx="2">
-            <a:schemeClr val="accent1"/>
-          </a:effectRef>
-          <a:fontRef idx="minor">
-            <a:schemeClr val="lt1"/>
-          </a:fontRef>
-        </p:style>
-        <p:txBody>
-          <a:bodyPr rtlCol="0" anchor="ctr"/>
-          <a:lstStyle/>
-          <a:p>
-            <a:pPr algn="ctr"/>
-          </a:p>
-        </p:txBody>
-      </p:sp>
-      <p:sp>
-        <p:nvSpPr>
-          <p:cNvPr id="47" name="TextBox 46"/>
-          <p:cNvSpPr txBox="1"/>
-          <p:nvPr/>
-        </p:nvSpPr>
-        <p:spPr>
-          <a:xfrm>
-            <a:off x="6248400" y="4519611"/>
-            <a:ext cx="2095500" cy="247650"/>
-          </a:xfrm>
-          <a:prstGeom prst="rect">
-            <a:avLst/>
-          </a:prstGeom>
-          <a:noFill/>
-        </p:spPr>
-        <p:txBody>
-          <a:bodyPr wrap="square" anchor="ctr">
-            <a:spAutoFit/>
-          </a:bodyPr>
-          <a:lstStyle/>
-          <a:p>
-            <a:pPr algn="l">
-              <a:lnSpc>
-                <a:spcPct val="100000"/>
-              </a:lnSpc>
-            </a:pPr>
-            <a:r>
-              <a:rPr sz="1000" b="0">
-                <a:solidFill>
-                  <a:srgbClr val="94A3B8"/>
-                </a:solidFill>
-                <a:latin typeface="PingFang SC"/>
-              </a:rPr>
-              <a:t>聚合仲裁</a:t>
-            </a:r>
-          </a:p>
-        </p:txBody>
-      </p:sp>
-      <p:sp>
-        <p:nvSpPr>
-          <p:cNvPr id="48" name="Rounded Rectangle 47"/>
-          <p:cNvSpPr/>
-          <p:nvPr/>
-        </p:nvSpPr>
-        <p:spPr>
-          <a:xfrm>
-            <a:off x="1847850" y="4729161"/>
-            <a:ext cx="8877300" cy="1100137"/>
-          </a:xfrm>
-          <a:prstGeom prst="roundRect">
-            <a:avLst>
-              <a:gd name="adj" fmla="val 8000"/>
-            </a:avLst>
-          </a:prstGeom>
-          <a:solidFill>
-            <a:srgbClr val="F1F5F9"/>
-          </a:solidFill>
-          <a:ln>
-            <a:noFill/>
-          </a:ln>
-          <a:effectLst/>
-        </p:spPr>
-        <p:style>
-          <a:lnRef idx="1">
-            <a:schemeClr val="accent1"/>
-          </a:lnRef>
-          <a:fillRef idx="3">
-            <a:schemeClr val="accent1"/>
-          </a:fillRef>
-          <a:effectRef idx="2">
-            <a:schemeClr val="accent1"/>
-          </a:effectRef>
-          <a:fontRef idx="minor">
-            <a:schemeClr val="lt1"/>
-          </a:fontRef>
-        </p:style>
-        <p:txBody>
-          <a:bodyPr rtlCol="0" anchor="ctr"/>
-          <a:lstStyle/>
-          <a:p>
-            <a:pPr algn="ctr"/>
-          </a:p>
-        </p:txBody>
-      </p:sp>
-      <p:sp>
-        <p:nvSpPr>
-          <p:cNvPr id="49" name="Rounded Rectangle 48"/>
-          <p:cNvSpPr/>
-          <p:nvPr/>
-        </p:nvSpPr>
-        <p:spPr>
-          <a:xfrm>
-            <a:off x="1905000" y="4767261"/>
-            <a:ext cx="4305300" cy="1023937"/>
-          </a:xfrm>
-          <a:prstGeom prst="roundRect">
-            <a:avLst>
-              <a:gd name="adj" fmla="val 8000"/>
-            </a:avLst>
-          </a:prstGeom>
-          <a:solidFill>
-            <a:srgbClr val="FFFFFF"/>
-          </a:solidFill>
-          <a:ln w="12700">
-            <a:solidFill>
-              <a:srgbClr val="F59E0B"/>
-            </a:solidFill>
-          </a:ln>
-          <a:effectLst/>
-        </p:spPr>
-        <p:style>
-          <a:lnRef idx="1">
-            <a:schemeClr val="accent1"/>
-          </a:lnRef>
-          <a:fillRef idx="3">
-            <a:schemeClr val="accent1"/>
-          </a:fillRef>
-          <a:effectRef idx="2">
-            <a:schemeClr val="accent1"/>
-          </a:effectRef>
-          <a:fontRef idx="minor">
-            <a:schemeClr val="lt1"/>
-          </a:fontRef>
-        </p:style>
-        <p:txBody>
-          <a:bodyPr rtlCol="0" anchor="ctr"/>
-          <a:lstStyle/>
-          <a:p>
-            <a:pPr algn="ctr"/>
-          </a:p>
-        </p:txBody>
-      </p:sp>
-      <p:sp>
-        <p:nvSpPr>
-          <p:cNvPr id="50" name="Rectangle 49"/>
-          <p:cNvSpPr/>
-          <p:nvPr/>
-        </p:nvSpPr>
-        <p:spPr>
-          <a:xfrm>
-            <a:off x="1905000" y="4767261"/>
-            <a:ext cx="47625" cy="1023937"/>
-          </a:xfrm>
-          <a:prstGeom prst="rect">
-            <a:avLst/>
-          </a:prstGeom>
-          <a:solidFill>
-            <a:srgbClr val="F59E0B"/>
-          </a:solidFill>
-          <a:ln>
-            <a:noFill/>
-          </a:ln>
-          <a:effectLst/>
-        </p:spPr>
-        <p:style>
-          <a:lnRef idx="1">
-            <a:schemeClr val="accent1"/>
-          </a:lnRef>
-          <a:fillRef idx="3">
-            <a:schemeClr val="accent1"/>
-          </a:fillRef>
-          <a:effectRef idx="2">
-            <a:schemeClr val="accent1"/>
-          </a:effectRef>
-          <a:fontRef idx="minor">
-            <a:schemeClr val="lt1"/>
-          </a:fontRef>
-        </p:style>
-        <p:txBody>
-          <a:bodyPr rtlCol="0" anchor="ctr"/>
-          <a:lstStyle/>
-          <a:p>
-            <a:pPr algn="ctr"/>
-          </a:p>
-        </p:txBody>
-      </p:sp>
-      <p:sp>
-        <p:nvSpPr>
-          <p:cNvPr id="51" name="TextBox 50"/>
-          <p:cNvSpPr txBox="1"/>
-          <p:nvPr/>
-        </p:nvSpPr>
-        <p:spPr>
-          <a:xfrm>
-            <a:off x="2038350" y="4767261"/>
-            <a:ext cx="4076700" cy="1023937"/>
-          </a:xfrm>
-          <a:prstGeom prst="rect">
-            <a:avLst/>
-          </a:prstGeom>
-          <a:noFill/>
-        </p:spPr>
-        <p:txBody>
-          <a:bodyPr wrap="square" anchor="ctr">
-            <a:spAutoFit/>
-          </a:bodyPr>
-          <a:lstStyle/>
-          <a:p>
-            <a:pPr algn="l">
-              <a:lnSpc>
-                <a:spcPct val="100000"/>
-              </a:lnSpc>
-            </a:pPr>
-            <a:r>
-              <a:rPr sz="1200" b="1">
-                <a:solidFill>
-                  <a:srgbClr val="475569"/>
-                </a:solidFill>
-                <a:latin typeface="PingFang SC"/>
-              </a:rPr>
-              <a:t>约束:超时隔离</a:t>
-            </a:r>
-          </a:p>
-        </p:txBody>
-      </p:sp>
-      <p:sp>
-        <p:nvSpPr>
-          <p:cNvPr id="52" name="Rounded Rectangle 51"/>
-          <p:cNvSpPr/>
-          <p:nvPr/>
-        </p:nvSpPr>
-        <p:spPr>
-          <a:xfrm>
-            <a:off x="6362700" y="4767261"/>
-            <a:ext cx="4305300" cy="1023937"/>
-          </a:xfrm>
-          <a:prstGeom prst="roundRect">
-            <a:avLst>
-              <a:gd name="adj" fmla="val 8000"/>
-            </a:avLst>
-          </a:prstGeom>
-          <a:solidFill>
-            <a:srgbClr val="FFFFFF"/>
-          </a:solidFill>
-          <a:ln w="12700">
-            <a:solidFill>
-              <a:srgbClr val="F59E0B"/>
-            </a:solidFill>
-          </a:ln>
-          <a:effectLst/>
-        </p:spPr>
-        <p:style>
-          <a:lnRef idx="1">
-            <a:schemeClr val="accent1"/>
-          </a:lnRef>
-          <a:fillRef idx="3">
-            <a:schemeClr val="accent1"/>
-          </a:fillRef>
-          <a:effectRef idx="2">
-            <a:schemeClr val="accent1"/>
-          </a:effectRef>
-          <a:fontRef idx="minor">
-            <a:schemeClr val="lt1"/>
-          </a:fontRef>
-        </p:style>
-        <p:txBody>
-          <a:bodyPr rtlCol="0" anchor="ctr"/>
-          <a:lstStyle/>
-          <a:p>
-            <a:pPr algn="ctr"/>
-          </a:p>
-        </p:txBody>
-      </p:sp>
-      <p:sp>
-        <p:nvSpPr>
-          <p:cNvPr id="53" name="Rectangle 52"/>
-          <p:cNvSpPr/>
-          <p:nvPr/>
-        </p:nvSpPr>
-        <p:spPr>
-          <a:xfrm>
-            <a:off x="6362700" y="4767261"/>
-            <a:ext cx="47625" cy="1023937"/>
-          </a:xfrm>
-          <a:prstGeom prst="rect">
-            <a:avLst/>
-          </a:prstGeom>
-          <a:solidFill>
-            <a:srgbClr val="F59E0B"/>
-          </a:solidFill>
-          <a:ln>
-            <a:noFill/>
-          </a:ln>
-          <a:effectLst/>
-        </p:spPr>
-        <p:style>
-          <a:lnRef idx="1">
-            <a:schemeClr val="accent1"/>
-          </a:lnRef>
-          <a:fillRef idx="3">
-            <a:schemeClr val="accent1"/>
-          </a:fillRef>
-          <a:effectRef idx="2">
-            <a:schemeClr val="accent1"/>
-          </a:effectRef>
-          <a:fontRef idx="minor">
-            <a:schemeClr val="lt1"/>
-          </a:fontRef>
-        </p:style>
-        <p:txBody>
-          <a:bodyPr rtlCol="0" anchor="ctr"/>
-          <a:lstStyle/>
-          <a:p>
-            <a:pPr algn="ctr"/>
-          </a:p>
-        </p:txBody>
-      </p:sp>
-      <p:sp>
-        <p:nvSpPr>
-          <p:cNvPr id="54" name="TextBox 53"/>
-          <p:cNvSpPr txBox="1"/>
-          <p:nvPr/>
-        </p:nvSpPr>
-        <p:spPr>
-          <a:xfrm>
-            <a:off x="6496050" y="4767261"/>
-            <a:ext cx="4076700" cy="1023937"/>
-          </a:xfrm>
-          <a:prstGeom prst="rect">
-            <a:avLst/>
-          </a:prstGeom>
-          <a:noFill/>
-        </p:spPr>
-        <p:txBody>
-          <a:bodyPr wrap="square" anchor="ctr">
-            <a:spAutoFit/>
-          </a:bodyPr>
-          <a:lstStyle/>
-          <a:p>
-            <a:pPr algn="l">
-              <a:lnSpc>
-                <a:spcPct val="100000"/>
-              </a:lnSpc>
-            </a:pPr>
-            <a:r>
-              <a:rPr sz="1200" b="1">
-                <a:solidFill>
-                  <a:srgbClr val="475569"/>
-                </a:solidFill>
-                <a:latin typeface="PingFang SC"/>
-              </a:rPr>
-              <a:t>Token 预算|asyncio.gather 实现十万级并发原语同款</a:t>
-            </a:r>
-          </a:p>
-        </p:txBody>
-      </p:sp>
-      <p:sp>
-        <p:nvSpPr>
-          <p:cNvPr id="55" name="TextBox 54"/>
-          <p:cNvSpPr txBox="1"/>
-          <p:nvPr/>
-        </p:nvSpPr>
-        <p:spPr>
-          <a:xfrm>
-            <a:off x="10287000" y="6534150"/>
-            <a:ext cx="1619250" cy="266700"/>
-          </a:xfrm>
-          <a:prstGeom prst="rect">
-            <a:avLst/>
-          </a:prstGeom>
-          <a:noFill/>
-        </p:spPr>
-        <p:txBody>
-          <a:bodyPr wrap="square" anchor="ctr">
-            <a:spAutoFit/>
-          </a:bodyPr>
-          <a:lstStyle/>
-          <a:p>
-            <a:pPr algn="r">
-              <a:lnSpc>
-                <a:spcPct val="100000"/>
-              </a:lnSpc>
-            </a:pPr>
-            <a:r>
               <a:rPr sz="900" b="0">
                 <a:solidFill>
                   <a:srgbClr val="94A3B8"/>
@@ -34103,7 +34364,7 @@
       </p:sp>
       <p:sp>
         <p:nvSpPr>
-          <p:cNvPr id="56" name="TextBox 55"/>
+          <p:cNvPr id="62" name="TextBox 61"/>
           <p:cNvSpPr txBox="1"/>
           <p:nvPr/>
         </p:nvSpPr>

--- a/03-课件PPT/讲次版/第5章-1-讲次 5-1 · Multi-Agent 模式与边界.pptx
+++ b/03-课件PPT/讲次版/第5章-1-讲次 5-1 · Multi-Agent 模式与边界.pptx
@@ -32107,7 +32107,7 @@
           <a:noFill/>
         </p:spPr>
         <p:txBody>
-          <a:bodyPr wrap="none" anchor="ctr">
+          <a:bodyPr wrap="square" anchor="ctr">
             <a:spAutoFit/>
           </a:bodyPr>
           <a:lstStyle/>
@@ -32118,7 +32118,7 @@
               </a:lnSpc>
             </a:pPr>
             <a:r>
-              <a:rPr sz="1100" b="1">
+              <a:rPr sz="1300" b="1">
                 <a:solidFill>
                   <a:srgbClr val="0B1D3A"/>
                 </a:solidFill>
@@ -32238,7 +32238,7 @@
           <a:noFill/>
         </p:spPr>
         <p:txBody>
-          <a:bodyPr wrap="none" anchor="ctr">
+          <a:bodyPr wrap="square" anchor="ctr">
             <a:spAutoFit/>
           </a:bodyPr>
           <a:lstStyle/>
@@ -32369,7 +32369,7 @@
           <a:noFill/>
         </p:spPr>
         <p:txBody>
-          <a:bodyPr wrap="none" anchor="ctr">
+          <a:bodyPr wrap="square" anchor="ctr">
             <a:spAutoFit/>
           </a:bodyPr>
           <a:lstStyle/>
@@ -32751,7 +32751,7 @@
           <a:noFill/>
         </p:spPr>
         <p:txBody>
-          <a:bodyPr wrap="none" anchor="ctr">
+          <a:bodyPr wrap="square" anchor="ctr">
             <a:spAutoFit/>
           </a:bodyPr>
           <a:lstStyle/>
@@ -32762,7 +32762,7 @@
               </a:lnSpc>
             </a:pPr>
             <a:r>
-              <a:rPr sz="900" b="1">
+              <a:rPr sz="1200" b="1">
                 <a:solidFill>
                   <a:srgbClr val="0B1D3A"/>
                 </a:solidFill>
@@ -32882,7 +32882,7 @@
           <a:noFill/>
         </p:spPr>
         <p:txBody>
-          <a:bodyPr wrap="none" anchor="ctr">
+          <a:bodyPr wrap="square" anchor="ctr">
             <a:spAutoFit/>
           </a:bodyPr>
           <a:lstStyle/>
@@ -33013,7 +33013,7 @@
           <a:noFill/>
         </p:spPr>
         <p:txBody>
-          <a:bodyPr wrap="none" anchor="ctr">
+          <a:bodyPr wrap="square" anchor="ctr">
             <a:spAutoFit/>
           </a:bodyPr>
           <a:lstStyle/>
@@ -33144,7 +33144,7 @@
           <a:noFill/>
         </p:spPr>
         <p:txBody>
-          <a:bodyPr wrap="none" anchor="ctr">
+          <a:bodyPr wrap="square" anchor="ctr">
             <a:spAutoFit/>
           </a:bodyPr>
           <a:lstStyle/>
@@ -33526,7 +33526,7 @@
           <a:noFill/>
         </p:spPr>
         <p:txBody>
-          <a:bodyPr wrap="none" anchor="ctr">
+          <a:bodyPr wrap="square" anchor="ctr">
             <a:spAutoFit/>
           </a:bodyPr>
           <a:lstStyle/>
@@ -33657,7 +33657,7 @@
           <a:noFill/>
         </p:spPr>
         <p:txBody>
-          <a:bodyPr wrap="none" anchor="ctr">
+          <a:bodyPr wrap="square" anchor="ctr">
             <a:spAutoFit/>
           </a:bodyPr>
           <a:lstStyle/>
@@ -33788,7 +33788,7 @@
           <a:noFill/>
         </p:spPr>
         <p:txBody>
-          <a:bodyPr wrap="none" anchor="ctr">
+          <a:bodyPr wrap="square" anchor="ctr">
             <a:spAutoFit/>
           </a:bodyPr>
           <a:lstStyle/>
@@ -34170,7 +34170,7 @@
           <a:noFill/>
         </p:spPr>
         <p:txBody>
-          <a:bodyPr wrap="none" anchor="ctr">
+          <a:bodyPr wrap="square" anchor="ctr">
             <a:spAutoFit/>
           </a:bodyPr>
           <a:lstStyle/>
@@ -34301,7 +34301,7 @@
           <a:noFill/>
         </p:spPr>
         <p:txBody>
-          <a:bodyPr wrap="none" anchor="ctr">
+          <a:bodyPr wrap="square" anchor="ctr">
             <a:spAutoFit/>
           </a:bodyPr>
           <a:lstStyle/>
